--- a/slides/CSC336-Lecture-25-REST-API-Development-and-Authentication.pptx
+++ b/slides/CSC336-Lecture-25-REST-API-Development-and-Authentication.pptx
@@ -3281,79 +3281,44 @@
       </p:sp>
       <p:sp>
         <p:nvSpPr>
-          <p:cNvPr id="6" name="Text 4"/>
+          <p:cNvPr id="8" name="cuinotes-footer-mark"/>
           <p:cNvSpPr txBox="1"/>
           <p:nvPr/>
         </p:nvSpPr>
         <p:spPr>
           <a:xfrm>
-            <a:off x="640080" y="6446520"/>
-            <a:ext cx="8686800" cy="292608"/>
-          </a:xfrm>
-          <a:prstGeom prst="rect">
-            <a:avLst/>
-          </a:prstGeom>
-          <a:noFill/>
-          <a:ln/>
-        </p:spPr>
-        <p:txBody>
-          <a:bodyPr wrap="square" lIns="0" tIns="0" rIns="0" bIns="0" rtlCol="0" anchor="ctr"/>
-          <a:lstStyle/>
-          <a:p>
-            <a:pPr algn="l" indent="0" marL="0">
-              <a:buNone/>
-            </a:pPr>
-            <a:r>
-              <a:rPr lang="en-US" sz="900" dirty="0">
-                <a:solidFill>
-                  <a:srgbClr val="9AA3D8"/>
-                </a:solidFill>
-                <a:latin typeface="Calibri" pitchFamily="34" charset="0"/>
-                <a:ea typeface="Calibri" pitchFamily="34" charset="-122"/>
-                <a:cs typeface="Calibri" pitchFamily="34" charset="-120"/>
-              </a:rPr>
-              <a:t>Usman Akram  •  COMSATS University Islamabad</a:t>
-            </a:r>
-            <a:endParaRPr lang="en-US" sz="900" dirty="0"/>
-          </a:p>
-        </p:txBody>
-      </p:sp>
-      <p:sp>
-        <p:nvSpPr>
-          <p:cNvPr id="7" name="Text 5"/>
-          <p:cNvSpPr txBox="1"/>
-          <p:nvPr/>
-        </p:nvSpPr>
-        <p:spPr>
-          <a:xfrm>
-            <a:off x="11155680" y="6446520"/>
-            <a:ext cx="457200" cy="292608"/>
-          </a:xfrm>
-          <a:prstGeom prst="rect">
-            <a:avLst/>
-          </a:prstGeom>
-          <a:noFill/>
-          <a:ln/>
-        </p:spPr>
-        <p:txBody>
-          <a:bodyPr wrap="square" lIns="0" tIns="0" rIns="0" bIns="0" rtlCol="0" anchor="ctr"/>
-          <a:lstStyle/>
-          <a:p>
-            <a:pPr algn="r" indent="0" marL="0">
-              <a:buNone/>
-            </a:pPr>
-            <a:r>
-              <a:rPr lang="en-US" sz="900" dirty="0">
-                <a:solidFill>
-                  <a:srgbClr val="9AA3D8"/>
-                </a:solidFill>
-                <a:latin typeface="Calibri" pitchFamily="34" charset="0"/>
-                <a:ea typeface="Calibri" pitchFamily="34" charset="-122"/>
-                <a:cs typeface="Calibri" pitchFamily="34" charset="-120"/>
-              </a:rPr>
-              <a:t>1</a:t>
-            </a:r>
-            <a:endParaRPr lang="en-US" sz="900" dirty="0"/>
+            <a:off x="9951720" y="6455664"/>
+            <a:ext cx="2011680" cy="292608"/>
+          </a:xfrm>
+          <a:prstGeom prst="rect">
+            <a:avLst/>
+          </a:prstGeom>
+          <a:noFill/>
+        </p:spPr>
+        <p:txBody>
+          <a:bodyPr wrap="none" lIns="0" rIns="0" tIns="0" bIns="0">
+            <a:spAutoFit/>
+          </a:bodyPr>
+          <a:lstStyle/>
+          <a:p>
+            <a:pPr algn="r"/>
+            <a:r>
+              <a:rPr sz="1000">
+                <a:solidFill>
+                  <a:srgbClr val="8A939B"/>
+                </a:solidFill>
+                <a:hlinkClick r:id="rId3"/>
+              </a:rPr>
+              <a:t>cuinotes.com</a:t>
+            </a:r>
+            <a:r>
+              <a:rPr sz="1000">
+                <a:solidFill>
+                  <a:srgbClr val="8A939B"/>
+                </a:solidFill>
+              </a:rPr>
+              <a:t>  ·  1</a:t>
+            </a:r>
           </a:p>
         </p:txBody>
       </p:sp>
@@ -3488,6 +3453,10 @@
           </a:solidFill>
           <a:ln/>
         </p:spPr>
+        <p:txBody>
+          <a:bodyPr/>
+          <a:p/>
+        </p:txBody>
       </p:sp>
       <p:sp>
         <p:nvSpPr>
@@ -3822,79 +3791,44 @@
       </p:sp>
       <p:sp>
         <p:nvSpPr>
-          <p:cNvPr id="6" name="Text 4"/>
+          <p:cNvPr id="8" name="cuinotes-footer-mark"/>
           <p:cNvSpPr txBox="1"/>
           <p:nvPr/>
         </p:nvSpPr>
         <p:spPr>
           <a:xfrm>
-            <a:off x="640080" y="6446520"/>
-            <a:ext cx="8686800" cy="292608"/>
-          </a:xfrm>
-          <a:prstGeom prst="rect">
-            <a:avLst/>
-          </a:prstGeom>
-          <a:noFill/>
-          <a:ln/>
-        </p:spPr>
-        <p:txBody>
-          <a:bodyPr wrap="square" lIns="0" tIns="0" rIns="0" bIns="0" rtlCol="0" anchor="ctr"/>
-          <a:lstStyle/>
-          <a:p>
-            <a:pPr algn="l" indent="0" marL="0">
-              <a:buNone/>
-            </a:pPr>
-            <a:r>
-              <a:rPr lang="en-US" sz="900" dirty="0">
-                <a:solidFill>
-                  <a:srgbClr val="5D5D72"/>
-                </a:solidFill>
-                <a:latin typeface="Calibri" pitchFamily="34" charset="0"/>
-                <a:ea typeface="Calibri" pitchFamily="34" charset="-122"/>
-                <a:cs typeface="Calibri" pitchFamily="34" charset="-120"/>
-              </a:rPr>
-              <a:t>Usman Akram  •  COMSATS University Islamabad</a:t>
-            </a:r>
-            <a:endParaRPr lang="en-US" sz="900" dirty="0"/>
-          </a:p>
-        </p:txBody>
-      </p:sp>
-      <p:sp>
-        <p:nvSpPr>
-          <p:cNvPr id="7" name="Text 5"/>
-          <p:cNvSpPr txBox="1"/>
-          <p:nvPr/>
-        </p:nvSpPr>
-        <p:spPr>
-          <a:xfrm>
-            <a:off x="11155680" y="6446520"/>
-            <a:ext cx="457200" cy="292608"/>
-          </a:xfrm>
-          <a:prstGeom prst="rect">
-            <a:avLst/>
-          </a:prstGeom>
-          <a:noFill/>
-          <a:ln/>
-        </p:spPr>
-        <p:txBody>
-          <a:bodyPr wrap="square" lIns="0" tIns="0" rIns="0" bIns="0" rtlCol="0" anchor="ctr"/>
-          <a:lstStyle/>
-          <a:p>
-            <a:pPr algn="r" indent="0" marL="0">
-              <a:buNone/>
-            </a:pPr>
-            <a:r>
-              <a:rPr lang="en-US" sz="900" dirty="0">
-                <a:solidFill>
-                  <a:srgbClr val="5D5D72"/>
-                </a:solidFill>
-                <a:latin typeface="Calibri" pitchFamily="34" charset="0"/>
-                <a:ea typeface="Calibri" pitchFamily="34" charset="-122"/>
-                <a:cs typeface="Calibri" pitchFamily="34" charset="-120"/>
-              </a:rPr>
-              <a:t>10</a:t>
-            </a:r>
-            <a:endParaRPr lang="en-US" sz="900" dirty="0"/>
+            <a:off x="9951720" y="6455664"/>
+            <a:ext cx="2011680" cy="292608"/>
+          </a:xfrm>
+          <a:prstGeom prst="rect">
+            <a:avLst/>
+          </a:prstGeom>
+          <a:noFill/>
+        </p:spPr>
+        <p:txBody>
+          <a:bodyPr wrap="none" lIns="0" rIns="0" tIns="0" bIns="0">
+            <a:spAutoFit/>
+          </a:bodyPr>
+          <a:lstStyle/>
+          <a:p>
+            <a:pPr algn="r"/>
+            <a:r>
+              <a:rPr sz="1000">
+                <a:solidFill>
+                  <a:srgbClr val="8A939B"/>
+                </a:solidFill>
+                <a:hlinkClick r:id="rId3"/>
+              </a:rPr>
+              <a:t>cuinotes.com</a:t>
+            </a:r>
+            <a:r>
+              <a:rPr sz="1000">
+                <a:solidFill>
+                  <a:srgbClr val="8A939B"/>
+                </a:solidFill>
+              </a:rPr>
+              <a:t>  ·  10</a:t>
+            </a:r>
           </a:p>
         </p:txBody>
       </p:sp>
@@ -4034,6 +3968,10 @@
             <a:prstDash val="solid"/>
           </a:ln>
         </p:spPr>
+        <p:txBody>
+          <a:bodyPr/>
+          <a:p/>
+        </p:txBody>
       </p:sp>
       <p:sp>
         <p:nvSpPr>
@@ -4115,79 +4053,44 @@
       </p:sp>
       <p:sp>
         <p:nvSpPr>
-          <p:cNvPr id="7" name="Text 5"/>
+          <p:cNvPr id="9" name="cuinotes-footer-mark"/>
           <p:cNvSpPr txBox="1"/>
           <p:nvPr/>
         </p:nvSpPr>
         <p:spPr>
           <a:xfrm>
-            <a:off x="640080" y="6446520"/>
-            <a:ext cx="8686800" cy="292608"/>
-          </a:xfrm>
-          <a:prstGeom prst="rect">
-            <a:avLst/>
-          </a:prstGeom>
-          <a:noFill/>
-          <a:ln/>
-        </p:spPr>
-        <p:txBody>
-          <a:bodyPr wrap="square" lIns="0" tIns="0" rIns="0" bIns="0" rtlCol="0" anchor="ctr"/>
-          <a:lstStyle/>
-          <a:p>
-            <a:pPr algn="l" indent="0" marL="0">
-              <a:buNone/>
-            </a:pPr>
-            <a:r>
-              <a:rPr lang="en-US" sz="900" dirty="0">
-                <a:solidFill>
-                  <a:srgbClr val="5D5D72"/>
-                </a:solidFill>
-                <a:latin typeface="Calibri" pitchFamily="34" charset="0"/>
-                <a:ea typeface="Calibri" pitchFamily="34" charset="-122"/>
-                <a:cs typeface="Calibri" pitchFamily="34" charset="-120"/>
-              </a:rPr>
-              <a:t>Usman Akram  •  COMSATS University Islamabad</a:t>
-            </a:r>
-            <a:endParaRPr lang="en-US" sz="900" dirty="0"/>
-          </a:p>
-        </p:txBody>
-      </p:sp>
-      <p:sp>
-        <p:nvSpPr>
-          <p:cNvPr id="8" name="Text 6"/>
-          <p:cNvSpPr txBox="1"/>
-          <p:nvPr/>
-        </p:nvSpPr>
-        <p:spPr>
-          <a:xfrm>
-            <a:off x="11155680" y="6446520"/>
-            <a:ext cx="457200" cy="292608"/>
-          </a:xfrm>
-          <a:prstGeom prst="rect">
-            <a:avLst/>
-          </a:prstGeom>
-          <a:noFill/>
-          <a:ln/>
-        </p:spPr>
-        <p:txBody>
-          <a:bodyPr wrap="square" lIns="0" tIns="0" rIns="0" bIns="0" rtlCol="0" anchor="ctr"/>
-          <a:lstStyle/>
-          <a:p>
-            <a:pPr algn="r" indent="0" marL="0">
-              <a:buNone/>
-            </a:pPr>
-            <a:r>
-              <a:rPr lang="en-US" sz="900" dirty="0">
-                <a:solidFill>
-                  <a:srgbClr val="5D5D72"/>
-                </a:solidFill>
-                <a:latin typeface="Calibri" pitchFamily="34" charset="0"/>
-                <a:ea typeface="Calibri" pitchFamily="34" charset="-122"/>
-                <a:cs typeface="Calibri" pitchFamily="34" charset="-120"/>
-              </a:rPr>
-              <a:t>11</a:t>
-            </a:r>
-            <a:endParaRPr lang="en-US" sz="900" dirty="0"/>
+            <a:off x="9951720" y="6455664"/>
+            <a:ext cx="2011680" cy="292608"/>
+          </a:xfrm>
+          <a:prstGeom prst="rect">
+            <a:avLst/>
+          </a:prstGeom>
+          <a:noFill/>
+        </p:spPr>
+        <p:txBody>
+          <a:bodyPr wrap="none" lIns="0" rIns="0" tIns="0" bIns="0">
+            <a:spAutoFit/>
+          </a:bodyPr>
+          <a:lstStyle/>
+          <a:p>
+            <a:pPr algn="r"/>
+            <a:r>
+              <a:rPr sz="1000">
+                <a:solidFill>
+                  <a:srgbClr val="8A939B"/>
+                </a:solidFill>
+                <a:hlinkClick r:id="rId3"/>
+              </a:rPr>
+              <a:t>cuinotes.com</a:t>
+            </a:r>
+            <a:r>
+              <a:rPr sz="1000">
+                <a:solidFill>
+                  <a:srgbClr val="8A939B"/>
+                </a:solidFill>
+              </a:rPr>
+              <a:t>  ·  11</a:t>
+            </a:r>
           </a:p>
         </p:txBody>
       </p:sp>
@@ -4320,6 +4223,10 @@
           </a:solidFill>
           <a:ln/>
         </p:spPr>
+        <p:txBody>
+          <a:bodyPr/>
+          <a:p/>
+        </p:txBody>
       </p:sp>
       <p:sp>
         <p:nvSpPr>
@@ -4418,6 +4325,10 @@
           </a:solidFill>
           <a:ln/>
         </p:spPr>
+        <p:txBody>
+          <a:bodyPr/>
+          <a:p/>
+        </p:txBody>
       </p:sp>
       <p:sp>
         <p:nvSpPr>
@@ -4516,6 +4427,10 @@
           </a:solidFill>
           <a:ln/>
         </p:spPr>
+        <p:txBody>
+          <a:bodyPr/>
+          <a:p/>
+        </p:txBody>
       </p:sp>
       <p:sp>
         <p:nvSpPr>
@@ -4614,6 +4529,10 @@
           </a:solidFill>
           <a:ln/>
         </p:spPr>
+        <p:txBody>
+          <a:bodyPr/>
+          <a:p/>
+        </p:txBody>
       </p:sp>
       <p:sp>
         <p:nvSpPr>
@@ -4695,79 +4614,44 @@
       </p:sp>
       <p:sp>
         <p:nvSpPr>
-          <p:cNvPr id="16" name="Text 14"/>
+          <p:cNvPr id="18" name="cuinotes-footer-mark"/>
           <p:cNvSpPr txBox="1"/>
           <p:nvPr/>
         </p:nvSpPr>
         <p:spPr>
           <a:xfrm>
-            <a:off x="640080" y="6446520"/>
-            <a:ext cx="8686800" cy="292608"/>
-          </a:xfrm>
-          <a:prstGeom prst="rect">
-            <a:avLst/>
-          </a:prstGeom>
-          <a:noFill/>
-          <a:ln/>
-        </p:spPr>
-        <p:txBody>
-          <a:bodyPr wrap="square" lIns="0" tIns="0" rIns="0" bIns="0" rtlCol="0" anchor="ctr"/>
-          <a:lstStyle/>
-          <a:p>
-            <a:pPr algn="l" indent="0" marL="0">
-              <a:buNone/>
-            </a:pPr>
-            <a:r>
-              <a:rPr lang="en-US" sz="900" dirty="0">
-                <a:solidFill>
-                  <a:srgbClr val="5D5D72"/>
-                </a:solidFill>
-                <a:latin typeface="Calibri" pitchFamily="34" charset="0"/>
-                <a:ea typeface="Calibri" pitchFamily="34" charset="-122"/>
-                <a:cs typeface="Calibri" pitchFamily="34" charset="-120"/>
-              </a:rPr>
-              <a:t>Usman Akram  •  COMSATS University Islamabad</a:t>
-            </a:r>
-            <a:endParaRPr lang="en-US" sz="900" dirty="0"/>
-          </a:p>
-        </p:txBody>
-      </p:sp>
-      <p:sp>
-        <p:nvSpPr>
-          <p:cNvPr id="17" name="Text 15"/>
-          <p:cNvSpPr txBox="1"/>
-          <p:nvPr/>
-        </p:nvSpPr>
-        <p:spPr>
-          <a:xfrm>
-            <a:off x="11155680" y="6446520"/>
-            <a:ext cx="457200" cy="292608"/>
-          </a:xfrm>
-          <a:prstGeom prst="rect">
-            <a:avLst/>
-          </a:prstGeom>
-          <a:noFill/>
-          <a:ln/>
-        </p:spPr>
-        <p:txBody>
-          <a:bodyPr wrap="square" lIns="0" tIns="0" rIns="0" bIns="0" rtlCol="0" anchor="ctr"/>
-          <a:lstStyle/>
-          <a:p>
-            <a:pPr algn="r" indent="0" marL="0">
-              <a:buNone/>
-            </a:pPr>
-            <a:r>
-              <a:rPr lang="en-US" sz="900" dirty="0">
-                <a:solidFill>
-                  <a:srgbClr val="5D5D72"/>
-                </a:solidFill>
-                <a:latin typeface="Calibri" pitchFamily="34" charset="0"/>
-                <a:ea typeface="Calibri" pitchFamily="34" charset="-122"/>
-                <a:cs typeface="Calibri" pitchFamily="34" charset="-120"/>
-              </a:rPr>
-              <a:t>12</a:t>
-            </a:r>
-            <a:endParaRPr lang="en-US" sz="900" dirty="0"/>
+            <a:off x="9951720" y="6455664"/>
+            <a:ext cx="2011680" cy="292608"/>
+          </a:xfrm>
+          <a:prstGeom prst="rect">
+            <a:avLst/>
+          </a:prstGeom>
+          <a:noFill/>
+        </p:spPr>
+        <p:txBody>
+          <a:bodyPr wrap="none" lIns="0" rIns="0" tIns="0" bIns="0">
+            <a:spAutoFit/>
+          </a:bodyPr>
+          <a:lstStyle/>
+          <a:p>
+            <a:pPr algn="r"/>
+            <a:r>
+              <a:rPr sz="1000">
+                <a:solidFill>
+                  <a:srgbClr val="8A939B"/>
+                </a:solidFill>
+                <a:hlinkClick r:id="rId3"/>
+              </a:rPr>
+              <a:t>cuinotes.com</a:t>
+            </a:r>
+            <a:r>
+              <a:rPr sz="1000">
+                <a:solidFill>
+                  <a:srgbClr val="8A939B"/>
+                </a:solidFill>
+              </a:rPr>
+              <a:t>  ·  12</a:t>
+            </a:r>
           </a:p>
         </p:txBody>
       </p:sp>
@@ -4900,6 +4784,10 @@
           </a:solidFill>
           <a:ln/>
         </p:spPr>
+        <p:txBody>
+          <a:bodyPr/>
+          <a:p/>
+        </p:txBody>
       </p:sp>
       <p:sp>
         <p:nvSpPr>
@@ -4998,6 +4886,10 @@
           </a:solidFill>
           <a:ln/>
         </p:spPr>
+        <p:txBody>
+          <a:bodyPr/>
+          <a:p/>
+        </p:txBody>
       </p:sp>
       <p:sp>
         <p:nvSpPr>
@@ -5096,6 +4988,10 @@
           </a:solidFill>
           <a:ln/>
         </p:spPr>
+        <p:txBody>
+          <a:bodyPr/>
+          <a:p/>
+        </p:txBody>
       </p:sp>
       <p:sp>
         <p:nvSpPr>
@@ -5194,6 +5090,10 @@
           </a:solidFill>
           <a:ln/>
         </p:spPr>
+        <p:txBody>
+          <a:bodyPr/>
+          <a:p/>
+        </p:txBody>
       </p:sp>
       <p:sp>
         <p:nvSpPr>
@@ -5275,79 +5175,44 @@
       </p:sp>
       <p:sp>
         <p:nvSpPr>
-          <p:cNvPr id="16" name="Text 14"/>
+          <p:cNvPr id="18" name="cuinotes-footer-mark"/>
           <p:cNvSpPr txBox="1"/>
           <p:nvPr/>
         </p:nvSpPr>
         <p:spPr>
           <a:xfrm>
-            <a:off x="640080" y="6446520"/>
-            <a:ext cx="8686800" cy="292608"/>
-          </a:xfrm>
-          <a:prstGeom prst="rect">
-            <a:avLst/>
-          </a:prstGeom>
-          <a:noFill/>
-          <a:ln/>
-        </p:spPr>
-        <p:txBody>
-          <a:bodyPr wrap="square" lIns="0" tIns="0" rIns="0" bIns="0" rtlCol="0" anchor="ctr"/>
-          <a:lstStyle/>
-          <a:p>
-            <a:pPr algn="l" indent="0" marL="0">
-              <a:buNone/>
-            </a:pPr>
-            <a:r>
-              <a:rPr lang="en-US" sz="900" dirty="0">
-                <a:solidFill>
-                  <a:srgbClr val="5D5D72"/>
-                </a:solidFill>
-                <a:latin typeface="Calibri" pitchFamily="34" charset="0"/>
-                <a:ea typeface="Calibri" pitchFamily="34" charset="-122"/>
-                <a:cs typeface="Calibri" pitchFamily="34" charset="-120"/>
-              </a:rPr>
-              <a:t>Usman Akram  •  COMSATS University Islamabad</a:t>
-            </a:r>
-            <a:endParaRPr lang="en-US" sz="900" dirty="0"/>
-          </a:p>
-        </p:txBody>
-      </p:sp>
-      <p:sp>
-        <p:nvSpPr>
-          <p:cNvPr id="17" name="Text 15"/>
-          <p:cNvSpPr txBox="1"/>
-          <p:nvPr/>
-        </p:nvSpPr>
-        <p:spPr>
-          <a:xfrm>
-            <a:off x="11155680" y="6446520"/>
-            <a:ext cx="457200" cy="292608"/>
-          </a:xfrm>
-          <a:prstGeom prst="rect">
-            <a:avLst/>
-          </a:prstGeom>
-          <a:noFill/>
-          <a:ln/>
-        </p:spPr>
-        <p:txBody>
-          <a:bodyPr wrap="square" lIns="0" tIns="0" rIns="0" bIns="0" rtlCol="0" anchor="ctr"/>
-          <a:lstStyle/>
-          <a:p>
-            <a:pPr algn="r" indent="0" marL="0">
-              <a:buNone/>
-            </a:pPr>
-            <a:r>
-              <a:rPr lang="en-US" sz="900" dirty="0">
-                <a:solidFill>
-                  <a:srgbClr val="5D5D72"/>
-                </a:solidFill>
-                <a:latin typeface="Calibri" pitchFamily="34" charset="0"/>
-                <a:ea typeface="Calibri" pitchFamily="34" charset="-122"/>
-                <a:cs typeface="Calibri" pitchFamily="34" charset="-120"/>
-              </a:rPr>
-              <a:t>13</a:t>
-            </a:r>
-            <a:endParaRPr lang="en-US" sz="900" dirty="0"/>
+            <a:off x="9951720" y="6455664"/>
+            <a:ext cx="2011680" cy="292608"/>
+          </a:xfrm>
+          <a:prstGeom prst="rect">
+            <a:avLst/>
+          </a:prstGeom>
+          <a:noFill/>
+        </p:spPr>
+        <p:txBody>
+          <a:bodyPr wrap="none" lIns="0" rIns="0" tIns="0" bIns="0">
+            <a:spAutoFit/>
+          </a:bodyPr>
+          <a:lstStyle/>
+          <a:p>
+            <a:pPr algn="r"/>
+            <a:r>
+              <a:rPr sz="1000">
+                <a:solidFill>
+                  <a:srgbClr val="8A939B"/>
+                </a:solidFill>
+                <a:hlinkClick r:id="rId3"/>
+              </a:rPr>
+              <a:t>cuinotes.com</a:t>
+            </a:r>
+            <a:r>
+              <a:rPr sz="1000">
+                <a:solidFill>
+                  <a:srgbClr val="8A939B"/>
+                </a:solidFill>
+              </a:rPr>
+              <a:t>  ·  13</a:t>
+            </a:r>
           </a:p>
         </p:txBody>
       </p:sp>
@@ -5484,6 +5349,10 @@
             <a:tailEnd type="triangle"/>
           </a:ln>
         </p:spPr>
+        <p:txBody>
+          <a:bodyPr/>
+          <a:p/>
+        </p:txBody>
       </p:sp>
       <p:sp>
         <p:nvSpPr>
@@ -5508,6 +5377,10 @@
             <a:tailEnd type="triangle"/>
           </a:ln>
         </p:spPr>
+        <p:txBody>
+          <a:bodyPr/>
+          <a:p/>
+        </p:txBody>
       </p:sp>
       <p:sp>
         <p:nvSpPr>
@@ -5532,6 +5405,10 @@
             <a:tailEnd type="triangle"/>
           </a:ln>
         </p:spPr>
+        <p:txBody>
+          <a:bodyPr/>
+          <a:p/>
+        </p:txBody>
       </p:sp>
       <p:sp>
         <p:nvSpPr>
@@ -5614,6 +5491,10 @@
             <a:tailEnd type="triangle"/>
           </a:ln>
         </p:spPr>
+        <p:txBody>
+          <a:bodyPr/>
+          <a:p/>
+        </p:txBody>
       </p:sp>
       <p:sp>
         <p:nvSpPr>
@@ -5696,6 +5577,10 @@
             <a:tailEnd type="triangle"/>
           </a:ln>
         </p:spPr>
+        <p:txBody>
+          <a:bodyPr/>
+          <a:p/>
+        </p:txBody>
       </p:sp>
       <p:sp>
         <p:nvSpPr>
@@ -5761,6 +5646,10 @@
             <a:tailEnd type="triangle"/>
           </a:ln>
         </p:spPr>
+        <p:txBody>
+          <a:bodyPr/>
+          <a:p/>
+        </p:txBody>
       </p:sp>
       <p:sp>
         <p:nvSpPr>
@@ -5843,6 +5732,10 @@
             <a:tailEnd type="triangle"/>
           </a:ln>
         </p:spPr>
+        <p:txBody>
+          <a:bodyPr/>
+          <a:p/>
+        </p:txBody>
       </p:sp>
       <p:sp>
         <p:nvSpPr>
@@ -5925,6 +5818,10 @@
             <a:tailEnd type="triangle"/>
           </a:ln>
         </p:spPr>
+        <p:txBody>
+          <a:bodyPr/>
+          <a:p/>
+        </p:txBody>
       </p:sp>
       <p:sp>
         <p:nvSpPr>
@@ -5986,6 +5883,10 @@
           </a:solidFill>
           <a:ln/>
         </p:spPr>
+        <p:txBody>
+          <a:bodyPr/>
+          <a:p/>
+        </p:txBody>
       </p:sp>
       <p:sp>
         <p:nvSpPr>
@@ -6048,6 +5949,10 @@
           </a:solidFill>
           <a:ln/>
         </p:spPr>
+        <p:txBody>
+          <a:bodyPr/>
+          <a:p/>
+        </p:txBody>
       </p:sp>
       <p:sp>
         <p:nvSpPr>
@@ -6132,79 +6037,44 @@
       </p:sp>
       <p:sp>
         <p:nvSpPr>
-          <p:cNvPr id="23" name="Text 21"/>
+          <p:cNvPr id="25" name="cuinotes-footer-mark"/>
           <p:cNvSpPr txBox="1"/>
           <p:nvPr/>
         </p:nvSpPr>
         <p:spPr>
           <a:xfrm>
-            <a:off x="640080" y="6446520"/>
-            <a:ext cx="8686800" cy="292608"/>
-          </a:xfrm>
-          <a:prstGeom prst="rect">
-            <a:avLst/>
-          </a:prstGeom>
-          <a:noFill/>
-          <a:ln/>
-        </p:spPr>
-        <p:txBody>
-          <a:bodyPr wrap="square" lIns="0" tIns="0" rIns="0" bIns="0" rtlCol="0" anchor="ctr"/>
-          <a:lstStyle/>
-          <a:p>
-            <a:pPr algn="l" indent="0" marL="0">
-              <a:buNone/>
-            </a:pPr>
-            <a:r>
-              <a:rPr lang="en-US" sz="900" dirty="0">
-                <a:solidFill>
-                  <a:srgbClr val="5D5D72"/>
-                </a:solidFill>
-                <a:latin typeface="Calibri" pitchFamily="34" charset="0"/>
-                <a:ea typeface="Calibri" pitchFamily="34" charset="-122"/>
-                <a:cs typeface="Calibri" pitchFamily="34" charset="-120"/>
-              </a:rPr>
-              <a:t>Usman Akram  •  COMSATS University Islamabad</a:t>
-            </a:r>
-            <a:endParaRPr lang="en-US" sz="900" dirty="0"/>
-          </a:p>
-        </p:txBody>
-      </p:sp>
-      <p:sp>
-        <p:nvSpPr>
-          <p:cNvPr id="24" name="Text 22"/>
-          <p:cNvSpPr txBox="1"/>
-          <p:nvPr/>
-        </p:nvSpPr>
-        <p:spPr>
-          <a:xfrm>
-            <a:off x="11155680" y="6446520"/>
-            <a:ext cx="457200" cy="292608"/>
-          </a:xfrm>
-          <a:prstGeom prst="rect">
-            <a:avLst/>
-          </a:prstGeom>
-          <a:noFill/>
-          <a:ln/>
-        </p:spPr>
-        <p:txBody>
-          <a:bodyPr wrap="square" lIns="0" tIns="0" rIns="0" bIns="0" rtlCol="0" anchor="ctr"/>
-          <a:lstStyle/>
-          <a:p>
-            <a:pPr algn="r" indent="0" marL="0">
-              <a:buNone/>
-            </a:pPr>
-            <a:r>
-              <a:rPr lang="en-US" sz="900" dirty="0">
-                <a:solidFill>
-                  <a:srgbClr val="5D5D72"/>
-                </a:solidFill>
-                <a:latin typeface="Calibri" pitchFamily="34" charset="0"/>
-                <a:ea typeface="Calibri" pitchFamily="34" charset="-122"/>
-                <a:cs typeface="Calibri" pitchFamily="34" charset="-120"/>
-              </a:rPr>
-              <a:t>14</a:t>
-            </a:r>
-            <a:endParaRPr lang="en-US" sz="900" dirty="0"/>
+            <a:off x="9951720" y="6455664"/>
+            <a:ext cx="2011680" cy="292608"/>
+          </a:xfrm>
+          <a:prstGeom prst="rect">
+            <a:avLst/>
+          </a:prstGeom>
+          <a:noFill/>
+        </p:spPr>
+        <p:txBody>
+          <a:bodyPr wrap="none" lIns="0" rIns="0" tIns="0" bIns="0">
+            <a:spAutoFit/>
+          </a:bodyPr>
+          <a:lstStyle/>
+          <a:p>
+            <a:pPr algn="r"/>
+            <a:r>
+              <a:rPr sz="1000">
+                <a:solidFill>
+                  <a:srgbClr val="8A939B"/>
+                </a:solidFill>
+                <a:hlinkClick r:id="rId3"/>
+              </a:rPr>
+              <a:t>cuinotes.com</a:t>
+            </a:r>
+            <a:r>
+              <a:rPr sz="1000">
+                <a:solidFill>
+                  <a:srgbClr val="8A939B"/>
+                </a:solidFill>
+              </a:rPr>
+              <a:t>  ·  14</a:t>
+            </a:r>
           </a:p>
         </p:txBody>
       </p:sp>
@@ -6339,6 +6209,10 @@
           </a:solidFill>
           <a:ln/>
         </p:spPr>
+        <p:txBody>
+          <a:bodyPr/>
+          <a:p/>
+        </p:txBody>
       </p:sp>
       <p:sp>
         <p:nvSpPr>
@@ -6682,79 +6556,44 @@
       </p:sp>
       <p:sp>
         <p:nvSpPr>
-          <p:cNvPr id="6" name="Text 4"/>
+          <p:cNvPr id="8" name="cuinotes-footer-mark"/>
           <p:cNvSpPr txBox="1"/>
           <p:nvPr/>
         </p:nvSpPr>
         <p:spPr>
           <a:xfrm>
-            <a:off x="640080" y="6446520"/>
-            <a:ext cx="8686800" cy="292608"/>
-          </a:xfrm>
-          <a:prstGeom prst="rect">
-            <a:avLst/>
-          </a:prstGeom>
-          <a:noFill/>
-          <a:ln/>
-        </p:spPr>
-        <p:txBody>
-          <a:bodyPr wrap="square" lIns="0" tIns="0" rIns="0" bIns="0" rtlCol="0" anchor="ctr"/>
-          <a:lstStyle/>
-          <a:p>
-            <a:pPr algn="l" indent="0" marL="0">
-              <a:buNone/>
-            </a:pPr>
-            <a:r>
-              <a:rPr lang="en-US" sz="900" dirty="0">
-                <a:solidFill>
-                  <a:srgbClr val="5D5D72"/>
-                </a:solidFill>
-                <a:latin typeface="Calibri" pitchFamily="34" charset="0"/>
-                <a:ea typeface="Calibri" pitchFamily="34" charset="-122"/>
-                <a:cs typeface="Calibri" pitchFamily="34" charset="-120"/>
-              </a:rPr>
-              <a:t>Usman Akram  •  COMSATS University Islamabad</a:t>
-            </a:r>
-            <a:endParaRPr lang="en-US" sz="900" dirty="0"/>
-          </a:p>
-        </p:txBody>
-      </p:sp>
-      <p:sp>
-        <p:nvSpPr>
-          <p:cNvPr id="7" name="Text 5"/>
-          <p:cNvSpPr txBox="1"/>
-          <p:nvPr/>
-        </p:nvSpPr>
-        <p:spPr>
-          <a:xfrm>
-            <a:off x="11155680" y="6446520"/>
-            <a:ext cx="457200" cy="292608"/>
-          </a:xfrm>
-          <a:prstGeom prst="rect">
-            <a:avLst/>
-          </a:prstGeom>
-          <a:noFill/>
-          <a:ln/>
-        </p:spPr>
-        <p:txBody>
-          <a:bodyPr wrap="square" lIns="0" tIns="0" rIns="0" bIns="0" rtlCol="0" anchor="ctr"/>
-          <a:lstStyle/>
-          <a:p>
-            <a:pPr algn="r" indent="0" marL="0">
-              <a:buNone/>
-            </a:pPr>
-            <a:r>
-              <a:rPr lang="en-US" sz="900" dirty="0">
-                <a:solidFill>
-                  <a:srgbClr val="5D5D72"/>
-                </a:solidFill>
-                <a:latin typeface="Calibri" pitchFamily="34" charset="0"/>
-                <a:ea typeface="Calibri" pitchFamily="34" charset="-122"/>
-                <a:cs typeface="Calibri" pitchFamily="34" charset="-120"/>
-              </a:rPr>
-              <a:t>15</a:t>
-            </a:r>
-            <a:endParaRPr lang="en-US" sz="900" dirty="0"/>
+            <a:off x="9951720" y="6455664"/>
+            <a:ext cx="2011680" cy="292608"/>
+          </a:xfrm>
+          <a:prstGeom prst="rect">
+            <a:avLst/>
+          </a:prstGeom>
+          <a:noFill/>
+        </p:spPr>
+        <p:txBody>
+          <a:bodyPr wrap="none" lIns="0" rIns="0" tIns="0" bIns="0">
+            <a:spAutoFit/>
+          </a:bodyPr>
+          <a:lstStyle/>
+          <a:p>
+            <a:pPr algn="r"/>
+            <a:r>
+              <a:rPr sz="1000">
+                <a:solidFill>
+                  <a:srgbClr val="8A939B"/>
+                </a:solidFill>
+                <a:hlinkClick r:id="rId3"/>
+              </a:rPr>
+              <a:t>cuinotes.com</a:t>
+            </a:r>
+            <a:r>
+              <a:rPr sz="1000">
+                <a:solidFill>
+                  <a:srgbClr val="8A939B"/>
+                </a:solidFill>
+              </a:rPr>
+              <a:t>  ·  15</a:t>
+            </a:r>
           </a:p>
         </p:txBody>
       </p:sp>
@@ -6889,6 +6728,10 @@
           </a:solidFill>
           <a:ln/>
         </p:spPr>
+        <p:txBody>
+          <a:bodyPr/>
+          <a:p/>
+        </p:txBody>
       </p:sp>
       <p:sp>
         <p:nvSpPr>
@@ -7183,79 +7026,44 @@
       </p:sp>
       <p:sp>
         <p:nvSpPr>
-          <p:cNvPr id="6" name="Text 4"/>
+          <p:cNvPr id="8" name="cuinotes-footer-mark"/>
           <p:cNvSpPr txBox="1"/>
           <p:nvPr/>
         </p:nvSpPr>
         <p:spPr>
           <a:xfrm>
-            <a:off x="640080" y="6446520"/>
-            <a:ext cx="8686800" cy="292608"/>
-          </a:xfrm>
-          <a:prstGeom prst="rect">
-            <a:avLst/>
-          </a:prstGeom>
-          <a:noFill/>
-          <a:ln/>
-        </p:spPr>
-        <p:txBody>
-          <a:bodyPr wrap="square" lIns="0" tIns="0" rIns="0" bIns="0" rtlCol="0" anchor="ctr"/>
-          <a:lstStyle/>
-          <a:p>
-            <a:pPr algn="l" indent="0" marL="0">
-              <a:buNone/>
-            </a:pPr>
-            <a:r>
-              <a:rPr lang="en-US" sz="900" dirty="0">
-                <a:solidFill>
-                  <a:srgbClr val="5D5D72"/>
-                </a:solidFill>
-                <a:latin typeface="Calibri" pitchFamily="34" charset="0"/>
-                <a:ea typeface="Calibri" pitchFamily="34" charset="-122"/>
-                <a:cs typeface="Calibri" pitchFamily="34" charset="-120"/>
-              </a:rPr>
-              <a:t>Usman Akram  •  COMSATS University Islamabad</a:t>
-            </a:r>
-            <a:endParaRPr lang="en-US" sz="900" dirty="0"/>
-          </a:p>
-        </p:txBody>
-      </p:sp>
-      <p:sp>
-        <p:nvSpPr>
-          <p:cNvPr id="7" name="Text 5"/>
-          <p:cNvSpPr txBox="1"/>
-          <p:nvPr/>
-        </p:nvSpPr>
-        <p:spPr>
-          <a:xfrm>
-            <a:off x="11155680" y="6446520"/>
-            <a:ext cx="457200" cy="292608"/>
-          </a:xfrm>
-          <a:prstGeom prst="rect">
-            <a:avLst/>
-          </a:prstGeom>
-          <a:noFill/>
-          <a:ln/>
-        </p:spPr>
-        <p:txBody>
-          <a:bodyPr wrap="square" lIns="0" tIns="0" rIns="0" bIns="0" rtlCol="0" anchor="ctr"/>
-          <a:lstStyle/>
-          <a:p>
-            <a:pPr algn="r" indent="0" marL="0">
-              <a:buNone/>
-            </a:pPr>
-            <a:r>
-              <a:rPr lang="en-US" sz="900" dirty="0">
-                <a:solidFill>
-                  <a:srgbClr val="5D5D72"/>
-                </a:solidFill>
-                <a:latin typeface="Calibri" pitchFamily="34" charset="0"/>
-                <a:ea typeface="Calibri" pitchFamily="34" charset="-122"/>
-                <a:cs typeface="Calibri" pitchFamily="34" charset="-120"/>
-              </a:rPr>
-              <a:t>16</a:t>
-            </a:r>
-            <a:endParaRPr lang="en-US" sz="900" dirty="0"/>
+            <a:off x="9951720" y="6455664"/>
+            <a:ext cx="2011680" cy="292608"/>
+          </a:xfrm>
+          <a:prstGeom prst="rect">
+            <a:avLst/>
+          </a:prstGeom>
+          <a:noFill/>
+        </p:spPr>
+        <p:txBody>
+          <a:bodyPr wrap="none" lIns="0" rIns="0" tIns="0" bIns="0">
+            <a:spAutoFit/>
+          </a:bodyPr>
+          <a:lstStyle/>
+          <a:p>
+            <a:pPr algn="r"/>
+            <a:r>
+              <a:rPr sz="1000">
+                <a:solidFill>
+                  <a:srgbClr val="8A939B"/>
+                </a:solidFill>
+                <a:hlinkClick r:id="rId3"/>
+              </a:rPr>
+              <a:t>cuinotes.com</a:t>
+            </a:r>
+            <a:r>
+              <a:rPr sz="1000">
+                <a:solidFill>
+                  <a:srgbClr val="8A939B"/>
+                </a:solidFill>
+              </a:rPr>
+              <a:t>  ·  16</a:t>
+            </a:r>
           </a:p>
         </p:txBody>
       </p:sp>
@@ -7388,6 +7196,10 @@
           </a:solidFill>
           <a:ln/>
         </p:spPr>
+        <p:txBody>
+          <a:bodyPr/>
+          <a:p/>
+        </p:txBody>
       </p:sp>
       <p:sp>
         <p:nvSpPr>
@@ -7486,6 +7298,10 @@
           </a:solidFill>
           <a:ln/>
         </p:spPr>
+        <p:txBody>
+          <a:bodyPr/>
+          <a:p/>
+        </p:txBody>
       </p:sp>
       <p:sp>
         <p:nvSpPr>
@@ -7584,6 +7400,10 @@
           </a:solidFill>
           <a:ln/>
         </p:spPr>
+        <p:txBody>
+          <a:bodyPr/>
+          <a:p/>
+        </p:txBody>
       </p:sp>
       <p:sp>
         <p:nvSpPr>
@@ -7665,79 +7485,44 @@
       </p:sp>
       <p:sp>
         <p:nvSpPr>
-          <p:cNvPr id="13" name="Text 11"/>
+          <p:cNvPr id="15" name="cuinotes-footer-mark"/>
           <p:cNvSpPr txBox="1"/>
           <p:nvPr/>
         </p:nvSpPr>
         <p:spPr>
           <a:xfrm>
-            <a:off x="640080" y="6446520"/>
-            <a:ext cx="8686800" cy="292608"/>
-          </a:xfrm>
-          <a:prstGeom prst="rect">
-            <a:avLst/>
-          </a:prstGeom>
-          <a:noFill/>
-          <a:ln/>
-        </p:spPr>
-        <p:txBody>
-          <a:bodyPr wrap="square" lIns="0" tIns="0" rIns="0" bIns="0" rtlCol="0" anchor="ctr"/>
-          <a:lstStyle/>
-          <a:p>
-            <a:pPr algn="l" indent="0" marL="0">
-              <a:buNone/>
-            </a:pPr>
-            <a:r>
-              <a:rPr lang="en-US" sz="900" dirty="0">
-                <a:solidFill>
-                  <a:srgbClr val="5D5D72"/>
-                </a:solidFill>
-                <a:latin typeface="Calibri" pitchFamily="34" charset="0"/>
-                <a:ea typeface="Calibri" pitchFamily="34" charset="-122"/>
-                <a:cs typeface="Calibri" pitchFamily="34" charset="-120"/>
-              </a:rPr>
-              <a:t>Usman Akram  •  COMSATS University Islamabad</a:t>
-            </a:r>
-            <a:endParaRPr lang="en-US" sz="900" dirty="0"/>
-          </a:p>
-        </p:txBody>
-      </p:sp>
-      <p:sp>
-        <p:nvSpPr>
-          <p:cNvPr id="14" name="Text 12"/>
-          <p:cNvSpPr txBox="1"/>
-          <p:nvPr/>
-        </p:nvSpPr>
-        <p:spPr>
-          <a:xfrm>
-            <a:off x="11155680" y="6446520"/>
-            <a:ext cx="457200" cy="292608"/>
-          </a:xfrm>
-          <a:prstGeom prst="rect">
-            <a:avLst/>
-          </a:prstGeom>
-          <a:noFill/>
-          <a:ln/>
-        </p:spPr>
-        <p:txBody>
-          <a:bodyPr wrap="square" lIns="0" tIns="0" rIns="0" bIns="0" rtlCol="0" anchor="ctr"/>
-          <a:lstStyle/>
-          <a:p>
-            <a:pPr algn="r" indent="0" marL="0">
-              <a:buNone/>
-            </a:pPr>
-            <a:r>
-              <a:rPr lang="en-US" sz="900" dirty="0">
-                <a:solidFill>
-                  <a:srgbClr val="5D5D72"/>
-                </a:solidFill>
-                <a:latin typeface="Calibri" pitchFamily="34" charset="0"/>
-                <a:ea typeface="Calibri" pitchFamily="34" charset="-122"/>
-                <a:cs typeface="Calibri" pitchFamily="34" charset="-120"/>
-              </a:rPr>
-              <a:t>17</a:t>
-            </a:r>
-            <a:endParaRPr lang="en-US" sz="900" dirty="0"/>
+            <a:off x="9951720" y="6455664"/>
+            <a:ext cx="2011680" cy="292608"/>
+          </a:xfrm>
+          <a:prstGeom prst="rect">
+            <a:avLst/>
+          </a:prstGeom>
+          <a:noFill/>
+        </p:spPr>
+        <p:txBody>
+          <a:bodyPr wrap="none" lIns="0" rIns="0" tIns="0" bIns="0">
+            <a:spAutoFit/>
+          </a:bodyPr>
+          <a:lstStyle/>
+          <a:p>
+            <a:pPr algn="r"/>
+            <a:r>
+              <a:rPr sz="1000">
+                <a:solidFill>
+                  <a:srgbClr val="8A939B"/>
+                </a:solidFill>
+                <a:hlinkClick r:id="rId3"/>
+              </a:rPr>
+              <a:t>cuinotes.com</a:t>
+            </a:r>
+            <a:r>
+              <a:rPr sz="1000">
+                <a:solidFill>
+                  <a:srgbClr val="8A939B"/>
+                </a:solidFill>
+              </a:rPr>
+              <a:t>  ·  17</a:t>
+            </a:r>
           </a:p>
         </p:txBody>
       </p:sp>
@@ -7872,6 +7657,10 @@
           </a:solidFill>
           <a:ln/>
         </p:spPr>
+        <p:txBody>
+          <a:bodyPr/>
+          <a:p/>
+        </p:txBody>
       </p:sp>
       <p:sp>
         <p:nvSpPr>
@@ -8137,79 +7926,44 @@
       </p:sp>
       <p:sp>
         <p:nvSpPr>
-          <p:cNvPr id="6" name="Text 4"/>
+          <p:cNvPr id="8" name="cuinotes-footer-mark"/>
           <p:cNvSpPr txBox="1"/>
           <p:nvPr/>
         </p:nvSpPr>
         <p:spPr>
           <a:xfrm>
-            <a:off x="640080" y="6446520"/>
-            <a:ext cx="8686800" cy="292608"/>
-          </a:xfrm>
-          <a:prstGeom prst="rect">
-            <a:avLst/>
-          </a:prstGeom>
-          <a:noFill/>
-          <a:ln/>
-        </p:spPr>
-        <p:txBody>
-          <a:bodyPr wrap="square" lIns="0" tIns="0" rIns="0" bIns="0" rtlCol="0" anchor="ctr"/>
-          <a:lstStyle/>
-          <a:p>
-            <a:pPr algn="l" indent="0" marL="0">
-              <a:buNone/>
-            </a:pPr>
-            <a:r>
-              <a:rPr lang="en-US" sz="900" dirty="0">
-                <a:solidFill>
-                  <a:srgbClr val="5D5D72"/>
-                </a:solidFill>
-                <a:latin typeface="Calibri" pitchFamily="34" charset="0"/>
-                <a:ea typeface="Calibri" pitchFamily="34" charset="-122"/>
-                <a:cs typeface="Calibri" pitchFamily="34" charset="-120"/>
-              </a:rPr>
-              <a:t>Usman Akram  •  COMSATS University Islamabad</a:t>
-            </a:r>
-            <a:endParaRPr lang="en-US" sz="900" dirty="0"/>
-          </a:p>
-        </p:txBody>
-      </p:sp>
-      <p:sp>
-        <p:nvSpPr>
-          <p:cNvPr id="7" name="Text 5"/>
-          <p:cNvSpPr txBox="1"/>
-          <p:nvPr/>
-        </p:nvSpPr>
-        <p:spPr>
-          <a:xfrm>
-            <a:off x="11155680" y="6446520"/>
-            <a:ext cx="457200" cy="292608"/>
-          </a:xfrm>
-          <a:prstGeom prst="rect">
-            <a:avLst/>
-          </a:prstGeom>
-          <a:noFill/>
-          <a:ln/>
-        </p:spPr>
-        <p:txBody>
-          <a:bodyPr wrap="square" lIns="0" tIns="0" rIns="0" bIns="0" rtlCol="0" anchor="ctr"/>
-          <a:lstStyle/>
-          <a:p>
-            <a:pPr algn="r" indent="0" marL="0">
-              <a:buNone/>
-            </a:pPr>
-            <a:r>
-              <a:rPr lang="en-US" sz="900" dirty="0">
-                <a:solidFill>
-                  <a:srgbClr val="5D5D72"/>
-                </a:solidFill>
-                <a:latin typeface="Calibri" pitchFamily="34" charset="0"/>
-                <a:ea typeface="Calibri" pitchFamily="34" charset="-122"/>
-                <a:cs typeface="Calibri" pitchFamily="34" charset="-120"/>
-              </a:rPr>
-              <a:t>18</a:t>
-            </a:r>
-            <a:endParaRPr lang="en-US" sz="900" dirty="0"/>
+            <a:off x="9951720" y="6455664"/>
+            <a:ext cx="2011680" cy="292608"/>
+          </a:xfrm>
+          <a:prstGeom prst="rect">
+            <a:avLst/>
+          </a:prstGeom>
+          <a:noFill/>
+        </p:spPr>
+        <p:txBody>
+          <a:bodyPr wrap="none" lIns="0" rIns="0" tIns="0" bIns="0">
+            <a:spAutoFit/>
+          </a:bodyPr>
+          <a:lstStyle/>
+          <a:p>
+            <a:pPr algn="r"/>
+            <a:r>
+              <a:rPr sz="1000">
+                <a:solidFill>
+                  <a:srgbClr val="8A939B"/>
+                </a:solidFill>
+                <a:hlinkClick r:id="rId3"/>
+              </a:rPr>
+              <a:t>cuinotes.com</a:t>
+            </a:r>
+            <a:r>
+              <a:rPr sz="1000">
+                <a:solidFill>
+                  <a:srgbClr val="8A939B"/>
+                </a:solidFill>
+              </a:rPr>
+              <a:t>  ·  18</a:t>
+            </a:r>
           </a:p>
         </p:txBody>
       </p:sp>
@@ -9581,79 +9335,44 @@
       </p:graphicFrame>
       <p:sp>
         <p:nvSpPr>
-          <p:cNvPr id="5" name="Text 2"/>
+          <p:cNvPr id="21" name="cuinotes-footer-mark"/>
           <p:cNvSpPr txBox="1"/>
           <p:nvPr/>
         </p:nvSpPr>
         <p:spPr>
           <a:xfrm>
-            <a:off x="640080" y="6446520"/>
-            <a:ext cx="8686800" cy="292608"/>
-          </a:xfrm>
-          <a:prstGeom prst="rect">
-            <a:avLst/>
-          </a:prstGeom>
-          <a:noFill/>
-          <a:ln/>
-        </p:spPr>
-        <p:txBody>
-          <a:bodyPr wrap="square" lIns="0" tIns="0" rIns="0" bIns="0" rtlCol="0" anchor="ctr"/>
-          <a:lstStyle/>
-          <a:p>
-            <a:pPr algn="l" indent="0" marL="0">
-              <a:buNone/>
-            </a:pPr>
-            <a:r>
-              <a:rPr lang="en-US" sz="900" dirty="0">
-                <a:solidFill>
-                  <a:srgbClr val="5D5D72"/>
-                </a:solidFill>
-                <a:latin typeface="Calibri" pitchFamily="34" charset="0"/>
-                <a:ea typeface="Calibri" pitchFamily="34" charset="-122"/>
-                <a:cs typeface="Calibri" pitchFamily="34" charset="-120"/>
-              </a:rPr>
-              <a:t>Usman Akram  •  COMSATS University Islamabad</a:t>
-            </a:r>
-            <a:endParaRPr lang="en-US" sz="900" dirty="0"/>
-          </a:p>
-        </p:txBody>
-      </p:sp>
-      <p:sp>
-        <p:nvSpPr>
-          <p:cNvPr id="6" name="Text 3"/>
-          <p:cNvSpPr txBox="1"/>
-          <p:nvPr/>
-        </p:nvSpPr>
-        <p:spPr>
-          <a:xfrm>
-            <a:off x="11155680" y="6446520"/>
-            <a:ext cx="457200" cy="292608"/>
-          </a:xfrm>
-          <a:prstGeom prst="rect">
-            <a:avLst/>
-          </a:prstGeom>
-          <a:noFill/>
-          <a:ln/>
-        </p:spPr>
-        <p:txBody>
-          <a:bodyPr wrap="square" lIns="0" tIns="0" rIns="0" bIns="0" rtlCol="0" anchor="ctr"/>
-          <a:lstStyle/>
-          <a:p>
-            <a:pPr algn="r" indent="0" marL="0">
-              <a:buNone/>
-            </a:pPr>
-            <a:r>
-              <a:rPr lang="en-US" sz="900" dirty="0">
-                <a:solidFill>
-                  <a:srgbClr val="5D5D72"/>
-                </a:solidFill>
-                <a:latin typeface="Calibri" pitchFamily="34" charset="0"/>
-                <a:ea typeface="Calibri" pitchFamily="34" charset="-122"/>
-                <a:cs typeface="Calibri" pitchFamily="34" charset="-120"/>
-              </a:rPr>
-              <a:t>19</a:t>
-            </a:r>
-            <a:endParaRPr lang="en-US" sz="900" dirty="0"/>
+            <a:off x="9951720" y="6455664"/>
+            <a:ext cx="2011680" cy="292608"/>
+          </a:xfrm>
+          <a:prstGeom prst="rect">
+            <a:avLst/>
+          </a:prstGeom>
+          <a:noFill/>
+        </p:spPr>
+        <p:txBody>
+          <a:bodyPr wrap="none" lIns="0" rIns="0" tIns="0" bIns="0">
+            <a:spAutoFit/>
+          </a:bodyPr>
+          <a:lstStyle/>
+          <a:p>
+            <a:pPr algn="r"/>
+            <a:r>
+              <a:rPr sz="1000">
+                <a:solidFill>
+                  <a:srgbClr val="8A939B"/>
+                </a:solidFill>
+                <a:hlinkClick r:id="rId3"/>
+              </a:rPr>
+              <a:t>cuinotes.com</a:t>
+            </a:r>
+            <a:r>
+              <a:rPr sz="1000">
+                <a:solidFill>
+                  <a:srgbClr val="8A939B"/>
+                </a:solidFill>
+              </a:rPr>
+              <a:t>  ·  19</a:t>
+            </a:r>
           </a:p>
         </p:txBody>
       </p:sp>
@@ -9786,6 +9505,10 @@
           </a:solidFill>
           <a:ln/>
         </p:spPr>
+        <p:txBody>
+          <a:bodyPr/>
+          <a:p/>
+        </p:txBody>
       </p:sp>
       <p:sp>
         <p:nvSpPr>
@@ -9884,6 +9607,10 @@
           </a:solidFill>
           <a:ln/>
         </p:spPr>
+        <p:txBody>
+          <a:bodyPr/>
+          <a:p/>
+        </p:txBody>
       </p:sp>
       <p:sp>
         <p:nvSpPr>
@@ -9982,6 +9709,10 @@
           </a:solidFill>
           <a:ln/>
         </p:spPr>
+        <p:txBody>
+          <a:bodyPr/>
+          <a:p/>
+        </p:txBody>
       </p:sp>
       <p:sp>
         <p:nvSpPr>
@@ -10080,6 +9811,10 @@
           </a:solidFill>
           <a:ln/>
         </p:spPr>
+        <p:txBody>
+          <a:bodyPr/>
+          <a:p/>
+        </p:txBody>
       </p:sp>
       <p:sp>
         <p:nvSpPr>
@@ -10178,6 +9913,10 @@
           </a:solidFill>
           <a:ln/>
         </p:spPr>
+        <p:txBody>
+          <a:bodyPr/>
+          <a:p/>
+        </p:txBody>
       </p:sp>
       <p:sp>
         <p:nvSpPr>
@@ -10259,79 +9998,44 @@
       </p:sp>
       <p:sp>
         <p:nvSpPr>
-          <p:cNvPr id="19" name="Text 17"/>
+          <p:cNvPr id="21" name="cuinotes-footer-mark"/>
           <p:cNvSpPr txBox="1"/>
           <p:nvPr/>
         </p:nvSpPr>
         <p:spPr>
           <a:xfrm>
-            <a:off x="640080" y="6446520"/>
-            <a:ext cx="8686800" cy="292608"/>
-          </a:xfrm>
-          <a:prstGeom prst="rect">
-            <a:avLst/>
-          </a:prstGeom>
-          <a:noFill/>
-          <a:ln/>
-        </p:spPr>
-        <p:txBody>
-          <a:bodyPr wrap="square" lIns="0" tIns="0" rIns="0" bIns="0" rtlCol="0" anchor="ctr"/>
-          <a:lstStyle/>
-          <a:p>
-            <a:pPr algn="l" indent="0" marL="0">
-              <a:buNone/>
-            </a:pPr>
-            <a:r>
-              <a:rPr lang="en-US" sz="900" dirty="0">
-                <a:solidFill>
-                  <a:srgbClr val="5D5D72"/>
-                </a:solidFill>
-                <a:latin typeface="Calibri" pitchFamily="34" charset="0"/>
-                <a:ea typeface="Calibri" pitchFamily="34" charset="-122"/>
-                <a:cs typeface="Calibri" pitchFamily="34" charset="-120"/>
-              </a:rPr>
-              <a:t>Usman Akram  •  COMSATS University Islamabad</a:t>
-            </a:r>
-            <a:endParaRPr lang="en-US" sz="900" dirty="0"/>
-          </a:p>
-        </p:txBody>
-      </p:sp>
-      <p:sp>
-        <p:nvSpPr>
-          <p:cNvPr id="20" name="Text 18"/>
-          <p:cNvSpPr txBox="1"/>
-          <p:nvPr/>
-        </p:nvSpPr>
-        <p:spPr>
-          <a:xfrm>
-            <a:off x="11155680" y="6446520"/>
-            <a:ext cx="457200" cy="292608"/>
-          </a:xfrm>
-          <a:prstGeom prst="rect">
-            <a:avLst/>
-          </a:prstGeom>
-          <a:noFill/>
-          <a:ln/>
-        </p:spPr>
-        <p:txBody>
-          <a:bodyPr wrap="square" lIns="0" tIns="0" rIns="0" bIns="0" rtlCol="0" anchor="ctr"/>
-          <a:lstStyle/>
-          <a:p>
-            <a:pPr algn="r" indent="0" marL="0">
-              <a:buNone/>
-            </a:pPr>
-            <a:r>
-              <a:rPr lang="en-US" sz="900" dirty="0">
-                <a:solidFill>
-                  <a:srgbClr val="5D5D72"/>
-                </a:solidFill>
-                <a:latin typeface="Calibri" pitchFamily="34" charset="0"/>
-                <a:ea typeface="Calibri" pitchFamily="34" charset="-122"/>
-                <a:cs typeface="Calibri" pitchFamily="34" charset="-120"/>
-              </a:rPr>
-              <a:t>2</a:t>
-            </a:r>
-            <a:endParaRPr lang="en-US" sz="900" dirty="0"/>
+            <a:off x="9951720" y="6455664"/>
+            <a:ext cx="2011680" cy="292608"/>
+          </a:xfrm>
+          <a:prstGeom prst="rect">
+            <a:avLst/>
+          </a:prstGeom>
+          <a:noFill/>
+        </p:spPr>
+        <p:txBody>
+          <a:bodyPr wrap="none" lIns="0" rIns="0" tIns="0" bIns="0">
+            <a:spAutoFit/>
+          </a:bodyPr>
+          <a:lstStyle/>
+          <a:p>
+            <a:pPr algn="r"/>
+            <a:r>
+              <a:rPr sz="1000">
+                <a:solidFill>
+                  <a:srgbClr val="8A939B"/>
+                </a:solidFill>
+                <a:hlinkClick r:id="rId3"/>
+              </a:rPr>
+              <a:t>cuinotes.com</a:t>
+            </a:r>
+            <a:r>
+              <a:rPr sz="1000">
+                <a:solidFill>
+                  <a:srgbClr val="8A939B"/>
+                </a:solidFill>
+              </a:rPr>
+              <a:t>  ·  2</a:t>
+            </a:r>
           </a:p>
         </p:txBody>
       </p:sp>
@@ -10471,6 +10175,10 @@
             <a:prstDash val="solid"/>
           </a:ln>
         </p:spPr>
+        <p:txBody>
+          <a:bodyPr/>
+          <a:p/>
+        </p:txBody>
       </p:sp>
       <p:sp>
         <p:nvSpPr>
@@ -10552,79 +10260,44 @@
       </p:sp>
       <p:sp>
         <p:nvSpPr>
-          <p:cNvPr id="7" name="Text 5"/>
+          <p:cNvPr id="9" name="cuinotes-footer-mark"/>
           <p:cNvSpPr txBox="1"/>
           <p:nvPr/>
         </p:nvSpPr>
         <p:spPr>
           <a:xfrm>
-            <a:off x="640080" y="6446520"/>
-            <a:ext cx="8686800" cy="292608"/>
-          </a:xfrm>
-          <a:prstGeom prst="rect">
-            <a:avLst/>
-          </a:prstGeom>
-          <a:noFill/>
-          <a:ln/>
-        </p:spPr>
-        <p:txBody>
-          <a:bodyPr wrap="square" lIns="0" tIns="0" rIns="0" bIns="0" rtlCol="0" anchor="ctr"/>
-          <a:lstStyle/>
-          <a:p>
-            <a:pPr algn="l" indent="0" marL="0">
-              <a:buNone/>
-            </a:pPr>
-            <a:r>
-              <a:rPr lang="en-US" sz="900" dirty="0">
-                <a:solidFill>
-                  <a:srgbClr val="5D5D72"/>
-                </a:solidFill>
-                <a:latin typeface="Calibri" pitchFamily="34" charset="0"/>
-                <a:ea typeface="Calibri" pitchFamily="34" charset="-122"/>
-                <a:cs typeface="Calibri" pitchFamily="34" charset="-120"/>
-              </a:rPr>
-              <a:t>Usman Akram  •  COMSATS University Islamabad</a:t>
-            </a:r>
-            <a:endParaRPr lang="en-US" sz="900" dirty="0"/>
-          </a:p>
-        </p:txBody>
-      </p:sp>
-      <p:sp>
-        <p:nvSpPr>
-          <p:cNvPr id="8" name="Text 6"/>
-          <p:cNvSpPr txBox="1"/>
-          <p:nvPr/>
-        </p:nvSpPr>
-        <p:spPr>
-          <a:xfrm>
-            <a:off x="11155680" y="6446520"/>
-            <a:ext cx="457200" cy="292608"/>
-          </a:xfrm>
-          <a:prstGeom prst="rect">
-            <a:avLst/>
-          </a:prstGeom>
-          <a:noFill/>
-          <a:ln/>
-        </p:spPr>
-        <p:txBody>
-          <a:bodyPr wrap="square" lIns="0" tIns="0" rIns="0" bIns="0" rtlCol="0" anchor="ctr"/>
-          <a:lstStyle/>
-          <a:p>
-            <a:pPr algn="r" indent="0" marL="0">
-              <a:buNone/>
-            </a:pPr>
-            <a:r>
-              <a:rPr lang="en-US" sz="900" dirty="0">
-                <a:solidFill>
-                  <a:srgbClr val="5D5D72"/>
-                </a:solidFill>
-                <a:latin typeface="Calibri" pitchFamily="34" charset="0"/>
-                <a:ea typeface="Calibri" pitchFamily="34" charset="-122"/>
-                <a:cs typeface="Calibri" pitchFamily="34" charset="-120"/>
-              </a:rPr>
-              <a:t>20</a:t>
-            </a:r>
-            <a:endParaRPr lang="en-US" sz="900" dirty="0"/>
+            <a:off x="9951720" y="6455664"/>
+            <a:ext cx="2011680" cy="292608"/>
+          </a:xfrm>
+          <a:prstGeom prst="rect">
+            <a:avLst/>
+          </a:prstGeom>
+          <a:noFill/>
+        </p:spPr>
+        <p:txBody>
+          <a:bodyPr wrap="none" lIns="0" rIns="0" tIns="0" bIns="0">
+            <a:spAutoFit/>
+          </a:bodyPr>
+          <a:lstStyle/>
+          <a:p>
+            <a:pPr algn="r"/>
+            <a:r>
+              <a:rPr sz="1000">
+                <a:solidFill>
+                  <a:srgbClr val="8A939B"/>
+                </a:solidFill>
+                <a:hlinkClick r:id="rId3"/>
+              </a:rPr>
+              <a:t>cuinotes.com</a:t>
+            </a:r>
+            <a:r>
+              <a:rPr sz="1000">
+                <a:solidFill>
+                  <a:srgbClr val="8A939B"/>
+                </a:solidFill>
+              </a:rPr>
+              <a:t>  ·  20</a:t>
+            </a:r>
           </a:p>
         </p:txBody>
       </p:sp>
@@ -10757,6 +10430,10 @@
           </a:solidFill>
           <a:ln/>
         </p:spPr>
+        <p:txBody>
+          <a:bodyPr/>
+          <a:p/>
+        </p:txBody>
       </p:sp>
       <p:sp>
         <p:nvSpPr>
@@ -10855,6 +10532,10 @@
           </a:solidFill>
           <a:ln/>
         </p:spPr>
+        <p:txBody>
+          <a:bodyPr/>
+          <a:p/>
+        </p:txBody>
       </p:sp>
       <p:sp>
         <p:nvSpPr>
@@ -10953,6 +10634,10 @@
           </a:solidFill>
           <a:ln/>
         </p:spPr>
+        <p:txBody>
+          <a:bodyPr/>
+          <a:p/>
+        </p:txBody>
       </p:sp>
       <p:sp>
         <p:nvSpPr>
@@ -11034,79 +10719,44 @@
       </p:sp>
       <p:sp>
         <p:nvSpPr>
-          <p:cNvPr id="13" name="Text 11"/>
+          <p:cNvPr id="15" name="cuinotes-footer-mark"/>
           <p:cNvSpPr txBox="1"/>
           <p:nvPr/>
         </p:nvSpPr>
         <p:spPr>
           <a:xfrm>
-            <a:off x="640080" y="6446520"/>
-            <a:ext cx="8686800" cy="292608"/>
-          </a:xfrm>
-          <a:prstGeom prst="rect">
-            <a:avLst/>
-          </a:prstGeom>
-          <a:noFill/>
-          <a:ln/>
-        </p:spPr>
-        <p:txBody>
-          <a:bodyPr wrap="square" lIns="0" tIns="0" rIns="0" bIns="0" rtlCol="0" anchor="ctr"/>
-          <a:lstStyle/>
-          <a:p>
-            <a:pPr algn="l" indent="0" marL="0">
-              <a:buNone/>
-            </a:pPr>
-            <a:r>
-              <a:rPr lang="en-US" sz="900" dirty="0">
-                <a:solidFill>
-                  <a:srgbClr val="5D5D72"/>
-                </a:solidFill>
-                <a:latin typeface="Calibri" pitchFamily="34" charset="0"/>
-                <a:ea typeface="Calibri" pitchFamily="34" charset="-122"/>
-                <a:cs typeface="Calibri" pitchFamily="34" charset="-120"/>
-              </a:rPr>
-              <a:t>Usman Akram  •  COMSATS University Islamabad</a:t>
-            </a:r>
-            <a:endParaRPr lang="en-US" sz="900" dirty="0"/>
-          </a:p>
-        </p:txBody>
-      </p:sp>
-      <p:sp>
-        <p:nvSpPr>
-          <p:cNvPr id="14" name="Text 12"/>
-          <p:cNvSpPr txBox="1"/>
-          <p:nvPr/>
-        </p:nvSpPr>
-        <p:spPr>
-          <a:xfrm>
-            <a:off x="11155680" y="6446520"/>
-            <a:ext cx="457200" cy="292608"/>
-          </a:xfrm>
-          <a:prstGeom prst="rect">
-            <a:avLst/>
-          </a:prstGeom>
-          <a:noFill/>
-          <a:ln/>
-        </p:spPr>
-        <p:txBody>
-          <a:bodyPr wrap="square" lIns="0" tIns="0" rIns="0" bIns="0" rtlCol="0" anchor="ctr"/>
-          <a:lstStyle/>
-          <a:p>
-            <a:pPr algn="r" indent="0" marL="0">
-              <a:buNone/>
-            </a:pPr>
-            <a:r>
-              <a:rPr lang="en-US" sz="900" dirty="0">
-                <a:solidFill>
-                  <a:srgbClr val="5D5D72"/>
-                </a:solidFill>
-                <a:latin typeface="Calibri" pitchFamily="34" charset="0"/>
-                <a:ea typeface="Calibri" pitchFamily="34" charset="-122"/>
-                <a:cs typeface="Calibri" pitchFamily="34" charset="-120"/>
-              </a:rPr>
-              <a:t>21</a:t>
-            </a:r>
-            <a:endParaRPr lang="en-US" sz="900" dirty="0"/>
+            <a:off x="9951720" y="6455664"/>
+            <a:ext cx="2011680" cy="292608"/>
+          </a:xfrm>
+          <a:prstGeom prst="rect">
+            <a:avLst/>
+          </a:prstGeom>
+          <a:noFill/>
+        </p:spPr>
+        <p:txBody>
+          <a:bodyPr wrap="none" lIns="0" rIns="0" tIns="0" bIns="0">
+            <a:spAutoFit/>
+          </a:bodyPr>
+          <a:lstStyle/>
+          <a:p>
+            <a:pPr algn="r"/>
+            <a:r>
+              <a:rPr sz="1000">
+                <a:solidFill>
+                  <a:srgbClr val="8A939B"/>
+                </a:solidFill>
+                <a:hlinkClick r:id="rId3"/>
+              </a:rPr>
+              <a:t>cuinotes.com</a:t>
+            </a:r>
+            <a:r>
+              <a:rPr sz="1000">
+                <a:solidFill>
+                  <a:srgbClr val="8A939B"/>
+                </a:solidFill>
+              </a:rPr>
+              <a:t>  ·  21</a:t>
+            </a:r>
           </a:p>
         </p:txBody>
       </p:sp>
@@ -11241,6 +10891,10 @@
           </a:solidFill>
           <a:ln/>
         </p:spPr>
+        <p:txBody>
+          <a:bodyPr/>
+          <a:p/>
+        </p:txBody>
       </p:sp>
       <p:sp>
         <p:nvSpPr>
@@ -11443,79 +11097,44 @@
       </p:sp>
       <p:sp>
         <p:nvSpPr>
-          <p:cNvPr id="7" name="Text 5"/>
+          <p:cNvPr id="9" name="cuinotes-footer-mark"/>
           <p:cNvSpPr txBox="1"/>
           <p:nvPr/>
         </p:nvSpPr>
         <p:spPr>
           <a:xfrm>
-            <a:off x="640080" y="6446520"/>
-            <a:ext cx="8686800" cy="292608"/>
-          </a:xfrm>
-          <a:prstGeom prst="rect">
-            <a:avLst/>
-          </a:prstGeom>
-          <a:noFill/>
-          <a:ln/>
-        </p:spPr>
-        <p:txBody>
-          <a:bodyPr wrap="square" lIns="0" tIns="0" rIns="0" bIns="0" rtlCol="0" anchor="ctr"/>
-          <a:lstStyle/>
-          <a:p>
-            <a:pPr algn="l" indent="0" marL="0">
-              <a:buNone/>
-            </a:pPr>
-            <a:r>
-              <a:rPr lang="en-US" sz="900" dirty="0">
-                <a:solidFill>
-                  <a:srgbClr val="5D5D72"/>
-                </a:solidFill>
-                <a:latin typeface="Calibri" pitchFamily="34" charset="0"/>
-                <a:ea typeface="Calibri" pitchFamily="34" charset="-122"/>
-                <a:cs typeface="Calibri" pitchFamily="34" charset="-120"/>
-              </a:rPr>
-              <a:t>Usman Akram  •  COMSATS University Islamabad</a:t>
-            </a:r>
-            <a:endParaRPr lang="en-US" sz="900" dirty="0"/>
-          </a:p>
-        </p:txBody>
-      </p:sp>
-      <p:sp>
-        <p:nvSpPr>
-          <p:cNvPr id="8" name="Text 6"/>
-          <p:cNvSpPr txBox="1"/>
-          <p:nvPr/>
-        </p:nvSpPr>
-        <p:spPr>
-          <a:xfrm>
-            <a:off x="11155680" y="6446520"/>
-            <a:ext cx="457200" cy="292608"/>
-          </a:xfrm>
-          <a:prstGeom prst="rect">
-            <a:avLst/>
-          </a:prstGeom>
-          <a:noFill/>
-          <a:ln/>
-        </p:spPr>
-        <p:txBody>
-          <a:bodyPr wrap="square" lIns="0" tIns="0" rIns="0" bIns="0" rtlCol="0" anchor="ctr"/>
-          <a:lstStyle/>
-          <a:p>
-            <a:pPr algn="r" indent="0" marL="0">
-              <a:buNone/>
-            </a:pPr>
-            <a:r>
-              <a:rPr lang="en-US" sz="900" dirty="0">
-                <a:solidFill>
-                  <a:srgbClr val="5D5D72"/>
-                </a:solidFill>
-                <a:latin typeface="Calibri" pitchFamily="34" charset="0"/>
-                <a:ea typeface="Calibri" pitchFamily="34" charset="-122"/>
-                <a:cs typeface="Calibri" pitchFamily="34" charset="-120"/>
-              </a:rPr>
-              <a:t>22</a:t>
-            </a:r>
-            <a:endParaRPr lang="en-US" sz="900" dirty="0"/>
+            <a:off x="9951720" y="6455664"/>
+            <a:ext cx="2011680" cy="292608"/>
+          </a:xfrm>
+          <a:prstGeom prst="rect">
+            <a:avLst/>
+          </a:prstGeom>
+          <a:noFill/>
+        </p:spPr>
+        <p:txBody>
+          <a:bodyPr wrap="none" lIns="0" rIns="0" tIns="0" bIns="0">
+            <a:spAutoFit/>
+          </a:bodyPr>
+          <a:lstStyle/>
+          <a:p>
+            <a:pPr algn="r"/>
+            <a:r>
+              <a:rPr sz="1000">
+                <a:solidFill>
+                  <a:srgbClr val="8A939B"/>
+                </a:solidFill>
+                <a:hlinkClick r:id="rId3"/>
+              </a:rPr>
+              <a:t>cuinotes.com</a:t>
+            </a:r>
+            <a:r>
+              <a:rPr sz="1000">
+                <a:solidFill>
+                  <a:srgbClr val="8A939B"/>
+                </a:solidFill>
+              </a:rPr>
+              <a:t>  ·  22</a:t>
+            </a:r>
           </a:p>
         </p:txBody>
       </p:sp>
@@ -11655,6 +11274,10 @@
             <a:prstDash val="solid"/>
           </a:ln>
         </p:spPr>
+        <p:txBody>
+          <a:bodyPr/>
+          <a:p/>
+        </p:txBody>
       </p:sp>
       <p:sp>
         <p:nvSpPr>
@@ -11736,79 +11359,44 @@
       </p:sp>
       <p:sp>
         <p:nvSpPr>
-          <p:cNvPr id="7" name="Text 5"/>
+          <p:cNvPr id="9" name="cuinotes-footer-mark"/>
           <p:cNvSpPr txBox="1"/>
           <p:nvPr/>
         </p:nvSpPr>
         <p:spPr>
           <a:xfrm>
-            <a:off x="640080" y="6446520"/>
-            <a:ext cx="8686800" cy="292608"/>
-          </a:xfrm>
-          <a:prstGeom prst="rect">
-            <a:avLst/>
-          </a:prstGeom>
-          <a:noFill/>
-          <a:ln/>
-        </p:spPr>
-        <p:txBody>
-          <a:bodyPr wrap="square" lIns="0" tIns="0" rIns="0" bIns="0" rtlCol="0" anchor="ctr"/>
-          <a:lstStyle/>
-          <a:p>
-            <a:pPr algn="l" indent="0" marL="0">
-              <a:buNone/>
-            </a:pPr>
-            <a:r>
-              <a:rPr lang="en-US" sz="900" dirty="0">
-                <a:solidFill>
-                  <a:srgbClr val="5D5D72"/>
-                </a:solidFill>
-                <a:latin typeface="Calibri" pitchFamily="34" charset="0"/>
-                <a:ea typeface="Calibri" pitchFamily="34" charset="-122"/>
-                <a:cs typeface="Calibri" pitchFamily="34" charset="-120"/>
-              </a:rPr>
-              <a:t>Usman Akram  •  COMSATS University Islamabad</a:t>
-            </a:r>
-            <a:endParaRPr lang="en-US" sz="900" dirty="0"/>
-          </a:p>
-        </p:txBody>
-      </p:sp>
-      <p:sp>
-        <p:nvSpPr>
-          <p:cNvPr id="8" name="Text 6"/>
-          <p:cNvSpPr txBox="1"/>
-          <p:nvPr/>
-        </p:nvSpPr>
-        <p:spPr>
-          <a:xfrm>
-            <a:off x="11155680" y="6446520"/>
-            <a:ext cx="457200" cy="292608"/>
-          </a:xfrm>
-          <a:prstGeom prst="rect">
-            <a:avLst/>
-          </a:prstGeom>
-          <a:noFill/>
-          <a:ln/>
-        </p:spPr>
-        <p:txBody>
-          <a:bodyPr wrap="square" lIns="0" tIns="0" rIns="0" bIns="0" rtlCol="0" anchor="ctr"/>
-          <a:lstStyle/>
-          <a:p>
-            <a:pPr algn="r" indent="0" marL="0">
-              <a:buNone/>
-            </a:pPr>
-            <a:r>
-              <a:rPr lang="en-US" sz="900" dirty="0">
-                <a:solidFill>
-                  <a:srgbClr val="5D5D72"/>
-                </a:solidFill>
-                <a:latin typeface="Calibri" pitchFamily="34" charset="0"/>
-                <a:ea typeface="Calibri" pitchFamily="34" charset="-122"/>
-                <a:cs typeface="Calibri" pitchFamily="34" charset="-120"/>
-              </a:rPr>
-              <a:t>23</a:t>
-            </a:r>
-            <a:endParaRPr lang="en-US" sz="900" dirty="0"/>
+            <a:off x="9951720" y="6455664"/>
+            <a:ext cx="2011680" cy="292608"/>
+          </a:xfrm>
+          <a:prstGeom prst="rect">
+            <a:avLst/>
+          </a:prstGeom>
+          <a:noFill/>
+        </p:spPr>
+        <p:txBody>
+          <a:bodyPr wrap="none" lIns="0" rIns="0" tIns="0" bIns="0">
+            <a:spAutoFit/>
+          </a:bodyPr>
+          <a:lstStyle/>
+          <a:p>
+            <a:pPr algn="r"/>
+            <a:r>
+              <a:rPr sz="1000">
+                <a:solidFill>
+                  <a:srgbClr val="8A939B"/>
+                </a:solidFill>
+                <a:hlinkClick r:id="rId3"/>
+              </a:rPr>
+              <a:t>cuinotes.com</a:t>
+            </a:r>
+            <a:r>
+              <a:rPr sz="1000">
+                <a:solidFill>
+                  <a:srgbClr val="8A939B"/>
+                </a:solidFill>
+              </a:rPr>
+              <a:t>  ·  23</a:t>
+            </a:r>
           </a:p>
         </p:txBody>
       </p:sp>
@@ -11943,6 +11531,10 @@
           </a:solidFill>
           <a:ln/>
         </p:spPr>
+        <p:txBody>
+          <a:bodyPr/>
+          <a:p/>
+        </p:txBody>
       </p:sp>
       <p:sp>
         <p:nvSpPr>
@@ -12256,79 +11848,44 @@
       </p:sp>
       <p:sp>
         <p:nvSpPr>
-          <p:cNvPr id="7" name="Text 5"/>
+          <p:cNvPr id="9" name="cuinotes-footer-mark"/>
           <p:cNvSpPr txBox="1"/>
           <p:nvPr/>
         </p:nvSpPr>
         <p:spPr>
           <a:xfrm>
-            <a:off x="640080" y="6446520"/>
-            <a:ext cx="8686800" cy="292608"/>
-          </a:xfrm>
-          <a:prstGeom prst="rect">
-            <a:avLst/>
-          </a:prstGeom>
-          <a:noFill/>
-          <a:ln/>
-        </p:spPr>
-        <p:txBody>
-          <a:bodyPr wrap="square" lIns="0" tIns="0" rIns="0" bIns="0" rtlCol="0" anchor="ctr"/>
-          <a:lstStyle/>
-          <a:p>
-            <a:pPr algn="l" indent="0" marL="0">
-              <a:buNone/>
-            </a:pPr>
-            <a:r>
-              <a:rPr lang="en-US" sz="900" dirty="0">
-                <a:solidFill>
-                  <a:srgbClr val="5D5D72"/>
-                </a:solidFill>
-                <a:latin typeface="Calibri" pitchFamily="34" charset="0"/>
-                <a:ea typeface="Calibri" pitchFamily="34" charset="-122"/>
-                <a:cs typeface="Calibri" pitchFamily="34" charset="-120"/>
-              </a:rPr>
-              <a:t>Usman Akram  •  COMSATS University Islamabad</a:t>
-            </a:r>
-            <a:endParaRPr lang="en-US" sz="900" dirty="0"/>
-          </a:p>
-        </p:txBody>
-      </p:sp>
-      <p:sp>
-        <p:nvSpPr>
-          <p:cNvPr id="8" name="Text 6"/>
-          <p:cNvSpPr txBox="1"/>
-          <p:nvPr/>
-        </p:nvSpPr>
-        <p:spPr>
-          <a:xfrm>
-            <a:off x="11155680" y="6446520"/>
-            <a:ext cx="457200" cy="292608"/>
-          </a:xfrm>
-          <a:prstGeom prst="rect">
-            <a:avLst/>
-          </a:prstGeom>
-          <a:noFill/>
-          <a:ln/>
-        </p:spPr>
-        <p:txBody>
-          <a:bodyPr wrap="square" lIns="0" tIns="0" rIns="0" bIns="0" rtlCol="0" anchor="ctr"/>
-          <a:lstStyle/>
-          <a:p>
-            <a:pPr algn="r" indent="0" marL="0">
-              <a:buNone/>
-            </a:pPr>
-            <a:r>
-              <a:rPr lang="en-US" sz="900" dirty="0">
-                <a:solidFill>
-                  <a:srgbClr val="5D5D72"/>
-                </a:solidFill>
-                <a:latin typeface="Calibri" pitchFamily="34" charset="0"/>
-                <a:ea typeface="Calibri" pitchFamily="34" charset="-122"/>
-                <a:cs typeface="Calibri" pitchFamily="34" charset="-120"/>
-              </a:rPr>
-              <a:t>24</a:t>
-            </a:r>
-            <a:endParaRPr lang="en-US" sz="900" dirty="0"/>
+            <a:off x="9951720" y="6455664"/>
+            <a:ext cx="2011680" cy="292608"/>
+          </a:xfrm>
+          <a:prstGeom prst="rect">
+            <a:avLst/>
+          </a:prstGeom>
+          <a:noFill/>
+        </p:spPr>
+        <p:txBody>
+          <a:bodyPr wrap="none" lIns="0" rIns="0" tIns="0" bIns="0">
+            <a:spAutoFit/>
+          </a:bodyPr>
+          <a:lstStyle/>
+          <a:p>
+            <a:pPr algn="r"/>
+            <a:r>
+              <a:rPr sz="1000">
+                <a:solidFill>
+                  <a:srgbClr val="8A939B"/>
+                </a:solidFill>
+                <a:hlinkClick r:id="rId3"/>
+              </a:rPr>
+              <a:t>cuinotes.com</a:t>
+            </a:r>
+            <a:r>
+              <a:rPr sz="1000">
+                <a:solidFill>
+                  <a:srgbClr val="8A939B"/>
+                </a:solidFill>
+              </a:rPr>
+              <a:t>  ·  24</a:t>
+            </a:r>
           </a:p>
         </p:txBody>
       </p:sp>
@@ -12468,6 +12025,10 @@
             <a:prstDash val="solid"/>
           </a:ln>
         </p:spPr>
+        <p:txBody>
+          <a:bodyPr/>
+          <a:p/>
+        </p:txBody>
       </p:sp>
       <p:sp>
         <p:nvSpPr>
@@ -12549,79 +12110,44 @@
       </p:sp>
       <p:sp>
         <p:nvSpPr>
-          <p:cNvPr id="7" name="Text 5"/>
+          <p:cNvPr id="9" name="cuinotes-footer-mark"/>
           <p:cNvSpPr txBox="1"/>
           <p:nvPr/>
         </p:nvSpPr>
         <p:spPr>
           <a:xfrm>
-            <a:off x="640080" y="6446520"/>
-            <a:ext cx="8686800" cy="292608"/>
-          </a:xfrm>
-          <a:prstGeom prst="rect">
-            <a:avLst/>
-          </a:prstGeom>
-          <a:noFill/>
-          <a:ln/>
-        </p:spPr>
-        <p:txBody>
-          <a:bodyPr wrap="square" lIns="0" tIns="0" rIns="0" bIns="0" rtlCol="0" anchor="ctr"/>
-          <a:lstStyle/>
-          <a:p>
-            <a:pPr algn="l" indent="0" marL="0">
-              <a:buNone/>
-            </a:pPr>
-            <a:r>
-              <a:rPr lang="en-US" sz="900" dirty="0">
-                <a:solidFill>
-                  <a:srgbClr val="5D5D72"/>
-                </a:solidFill>
-                <a:latin typeface="Calibri" pitchFamily="34" charset="0"/>
-                <a:ea typeface="Calibri" pitchFamily="34" charset="-122"/>
-                <a:cs typeface="Calibri" pitchFamily="34" charset="-120"/>
-              </a:rPr>
-              <a:t>Usman Akram  •  COMSATS University Islamabad</a:t>
-            </a:r>
-            <a:endParaRPr lang="en-US" sz="900" dirty="0"/>
-          </a:p>
-        </p:txBody>
-      </p:sp>
-      <p:sp>
-        <p:nvSpPr>
-          <p:cNvPr id="8" name="Text 6"/>
-          <p:cNvSpPr txBox="1"/>
-          <p:nvPr/>
-        </p:nvSpPr>
-        <p:spPr>
-          <a:xfrm>
-            <a:off x="11155680" y="6446520"/>
-            <a:ext cx="457200" cy="292608"/>
-          </a:xfrm>
-          <a:prstGeom prst="rect">
-            <a:avLst/>
-          </a:prstGeom>
-          <a:noFill/>
-          <a:ln/>
-        </p:spPr>
-        <p:txBody>
-          <a:bodyPr wrap="square" lIns="0" tIns="0" rIns="0" bIns="0" rtlCol="0" anchor="ctr"/>
-          <a:lstStyle/>
-          <a:p>
-            <a:pPr algn="r" indent="0" marL="0">
-              <a:buNone/>
-            </a:pPr>
-            <a:r>
-              <a:rPr lang="en-US" sz="900" dirty="0">
-                <a:solidFill>
-                  <a:srgbClr val="5D5D72"/>
-                </a:solidFill>
-                <a:latin typeface="Calibri" pitchFamily="34" charset="0"/>
-                <a:ea typeface="Calibri" pitchFamily="34" charset="-122"/>
-                <a:cs typeface="Calibri" pitchFamily="34" charset="-120"/>
-              </a:rPr>
-              <a:t>25</a:t>
-            </a:r>
-            <a:endParaRPr lang="en-US" sz="900" dirty="0"/>
+            <a:off x="9951720" y="6455664"/>
+            <a:ext cx="2011680" cy="292608"/>
+          </a:xfrm>
+          <a:prstGeom prst="rect">
+            <a:avLst/>
+          </a:prstGeom>
+          <a:noFill/>
+        </p:spPr>
+        <p:txBody>
+          <a:bodyPr wrap="none" lIns="0" rIns="0" tIns="0" bIns="0">
+            <a:spAutoFit/>
+          </a:bodyPr>
+          <a:lstStyle/>
+          <a:p>
+            <a:pPr algn="r"/>
+            <a:r>
+              <a:rPr sz="1000">
+                <a:solidFill>
+                  <a:srgbClr val="8A939B"/>
+                </a:solidFill>
+                <a:hlinkClick r:id="rId3"/>
+              </a:rPr>
+              <a:t>cuinotes.com</a:t>
+            </a:r>
+            <a:r>
+              <a:rPr sz="1000">
+                <a:solidFill>
+                  <a:srgbClr val="8A939B"/>
+                </a:solidFill>
+              </a:rPr>
+              <a:t>  ·  25</a:t>
+            </a:r>
           </a:p>
         </p:txBody>
       </p:sp>
@@ -12754,6 +12280,10 @@
           </a:solidFill>
           <a:ln/>
         </p:spPr>
+        <p:txBody>
+          <a:bodyPr/>
+          <a:p/>
+        </p:txBody>
       </p:sp>
       <p:sp>
         <p:nvSpPr>
@@ -12852,6 +12382,10 @@
           </a:solidFill>
           <a:ln/>
         </p:spPr>
+        <p:txBody>
+          <a:bodyPr/>
+          <a:p/>
+        </p:txBody>
       </p:sp>
       <p:sp>
         <p:nvSpPr>
@@ -12950,6 +12484,10 @@
           </a:solidFill>
           <a:ln/>
         </p:spPr>
+        <p:txBody>
+          <a:bodyPr/>
+          <a:p/>
+        </p:txBody>
       </p:sp>
       <p:sp>
         <p:nvSpPr>
@@ -13048,6 +12586,10 @@
           </a:solidFill>
           <a:ln/>
         </p:spPr>
+        <p:txBody>
+          <a:bodyPr/>
+          <a:p/>
+        </p:txBody>
       </p:sp>
       <p:sp>
         <p:nvSpPr>
@@ -13146,6 +12688,10 @@
           </a:solidFill>
           <a:ln/>
         </p:spPr>
+        <p:txBody>
+          <a:bodyPr/>
+          <a:p/>
+        </p:txBody>
       </p:sp>
       <p:sp>
         <p:nvSpPr>
@@ -13244,6 +12790,10 @@
           </a:solidFill>
           <a:ln/>
         </p:spPr>
+        <p:txBody>
+          <a:bodyPr/>
+          <a:p/>
+        </p:txBody>
       </p:sp>
       <p:sp>
         <p:nvSpPr>
@@ -13325,79 +12875,44 @@
       </p:sp>
       <p:sp>
         <p:nvSpPr>
-          <p:cNvPr id="22" name="Text 20"/>
+          <p:cNvPr id="24" name="cuinotes-footer-mark"/>
           <p:cNvSpPr txBox="1"/>
           <p:nvPr/>
         </p:nvSpPr>
         <p:spPr>
           <a:xfrm>
-            <a:off x="640080" y="6446520"/>
-            <a:ext cx="8686800" cy="292608"/>
-          </a:xfrm>
-          <a:prstGeom prst="rect">
-            <a:avLst/>
-          </a:prstGeom>
-          <a:noFill/>
-          <a:ln/>
-        </p:spPr>
-        <p:txBody>
-          <a:bodyPr wrap="square" lIns="0" tIns="0" rIns="0" bIns="0" rtlCol="0" anchor="ctr"/>
-          <a:lstStyle/>
-          <a:p>
-            <a:pPr algn="l" indent="0" marL="0">
-              <a:buNone/>
-            </a:pPr>
-            <a:r>
-              <a:rPr lang="en-US" sz="900" dirty="0">
-                <a:solidFill>
-                  <a:srgbClr val="9AA3D8"/>
-                </a:solidFill>
-                <a:latin typeface="Calibri" pitchFamily="34" charset="0"/>
-                <a:ea typeface="Calibri" pitchFamily="34" charset="-122"/>
-                <a:cs typeface="Calibri" pitchFamily="34" charset="-120"/>
-              </a:rPr>
-              <a:t>Usman Akram  •  COMSATS University Islamabad</a:t>
-            </a:r>
-            <a:endParaRPr lang="en-US" sz="900" dirty="0"/>
-          </a:p>
-        </p:txBody>
-      </p:sp>
-      <p:sp>
-        <p:nvSpPr>
-          <p:cNvPr id="23" name="Text 21"/>
-          <p:cNvSpPr txBox="1"/>
-          <p:nvPr/>
-        </p:nvSpPr>
-        <p:spPr>
-          <a:xfrm>
-            <a:off x="11155680" y="6446520"/>
-            <a:ext cx="457200" cy="292608"/>
-          </a:xfrm>
-          <a:prstGeom prst="rect">
-            <a:avLst/>
-          </a:prstGeom>
-          <a:noFill/>
-          <a:ln/>
-        </p:spPr>
-        <p:txBody>
-          <a:bodyPr wrap="square" lIns="0" tIns="0" rIns="0" bIns="0" rtlCol="0" anchor="ctr"/>
-          <a:lstStyle/>
-          <a:p>
-            <a:pPr algn="r" indent="0" marL="0">
-              <a:buNone/>
-            </a:pPr>
-            <a:r>
-              <a:rPr lang="en-US" sz="900" dirty="0">
-                <a:solidFill>
-                  <a:srgbClr val="9AA3D8"/>
-                </a:solidFill>
-                <a:latin typeface="Calibri" pitchFamily="34" charset="0"/>
-                <a:ea typeface="Calibri" pitchFamily="34" charset="-122"/>
-                <a:cs typeface="Calibri" pitchFamily="34" charset="-120"/>
-              </a:rPr>
-              <a:t>26</a:t>
-            </a:r>
-            <a:endParaRPr lang="en-US" sz="900" dirty="0"/>
+            <a:off x="9951720" y="6455664"/>
+            <a:ext cx="2011680" cy="292608"/>
+          </a:xfrm>
+          <a:prstGeom prst="rect">
+            <a:avLst/>
+          </a:prstGeom>
+          <a:noFill/>
+        </p:spPr>
+        <p:txBody>
+          <a:bodyPr wrap="none" lIns="0" rIns="0" tIns="0" bIns="0">
+            <a:spAutoFit/>
+          </a:bodyPr>
+          <a:lstStyle/>
+          <a:p>
+            <a:pPr algn="r"/>
+            <a:r>
+              <a:rPr sz="1000">
+                <a:solidFill>
+                  <a:srgbClr val="8A939B"/>
+                </a:solidFill>
+                <a:hlinkClick r:id="rId3"/>
+              </a:rPr>
+              <a:t>cuinotes.com</a:t>
+            </a:r>
+            <a:r>
+              <a:rPr sz="1000">
+                <a:solidFill>
+                  <a:srgbClr val="8A939B"/>
+                </a:solidFill>
+              </a:rPr>
+              <a:t>  ·  26</a:t>
+            </a:r>
           </a:p>
         </p:txBody>
       </p:sp>
@@ -13530,6 +13045,10 @@
           </a:solidFill>
           <a:ln/>
         </p:spPr>
+        <p:txBody>
+          <a:bodyPr/>
+          <a:p/>
+        </p:txBody>
       </p:sp>
       <p:sp>
         <p:nvSpPr>
@@ -13628,6 +13147,10 @@
           </a:solidFill>
           <a:ln/>
         </p:spPr>
+        <p:txBody>
+          <a:bodyPr/>
+          <a:p/>
+        </p:txBody>
       </p:sp>
       <p:sp>
         <p:nvSpPr>
@@ -13726,6 +13249,10 @@
           </a:solidFill>
           <a:ln/>
         </p:spPr>
+        <p:txBody>
+          <a:bodyPr/>
+          <a:p/>
+        </p:txBody>
       </p:sp>
       <p:sp>
         <p:nvSpPr>
@@ -13807,79 +13334,44 @@
       </p:sp>
       <p:sp>
         <p:nvSpPr>
-          <p:cNvPr id="13" name="Text 11"/>
+          <p:cNvPr id="15" name="cuinotes-footer-mark"/>
           <p:cNvSpPr txBox="1"/>
           <p:nvPr/>
         </p:nvSpPr>
         <p:spPr>
           <a:xfrm>
-            <a:off x="640080" y="6446520"/>
-            <a:ext cx="8686800" cy="292608"/>
-          </a:xfrm>
-          <a:prstGeom prst="rect">
-            <a:avLst/>
-          </a:prstGeom>
-          <a:noFill/>
-          <a:ln/>
-        </p:spPr>
-        <p:txBody>
-          <a:bodyPr wrap="square" lIns="0" tIns="0" rIns="0" bIns="0" rtlCol="0" anchor="ctr"/>
-          <a:lstStyle/>
-          <a:p>
-            <a:pPr algn="l" indent="0" marL="0">
-              <a:buNone/>
-            </a:pPr>
-            <a:r>
-              <a:rPr lang="en-US" sz="900" dirty="0">
-                <a:solidFill>
-                  <a:srgbClr val="5D5D72"/>
-                </a:solidFill>
-                <a:latin typeface="Calibri" pitchFamily="34" charset="0"/>
-                <a:ea typeface="Calibri" pitchFamily="34" charset="-122"/>
-                <a:cs typeface="Calibri" pitchFamily="34" charset="-120"/>
-              </a:rPr>
-              <a:t>Usman Akram  •  COMSATS University Islamabad</a:t>
-            </a:r>
-            <a:endParaRPr lang="en-US" sz="900" dirty="0"/>
-          </a:p>
-        </p:txBody>
-      </p:sp>
-      <p:sp>
-        <p:nvSpPr>
-          <p:cNvPr id="14" name="Text 12"/>
-          <p:cNvSpPr txBox="1"/>
-          <p:nvPr/>
-        </p:nvSpPr>
-        <p:spPr>
-          <a:xfrm>
-            <a:off x="11155680" y="6446520"/>
-            <a:ext cx="457200" cy="292608"/>
-          </a:xfrm>
-          <a:prstGeom prst="rect">
-            <a:avLst/>
-          </a:prstGeom>
-          <a:noFill/>
-          <a:ln/>
-        </p:spPr>
-        <p:txBody>
-          <a:bodyPr wrap="square" lIns="0" tIns="0" rIns="0" bIns="0" rtlCol="0" anchor="ctr"/>
-          <a:lstStyle/>
-          <a:p>
-            <a:pPr algn="r" indent="0" marL="0">
-              <a:buNone/>
-            </a:pPr>
-            <a:r>
-              <a:rPr lang="en-US" sz="900" dirty="0">
-                <a:solidFill>
-                  <a:srgbClr val="5D5D72"/>
-                </a:solidFill>
-                <a:latin typeface="Calibri" pitchFamily="34" charset="0"/>
-                <a:ea typeface="Calibri" pitchFamily="34" charset="-122"/>
-                <a:cs typeface="Calibri" pitchFamily="34" charset="-120"/>
-              </a:rPr>
-              <a:t>3</a:t>
-            </a:r>
-            <a:endParaRPr lang="en-US" sz="900" dirty="0"/>
+            <a:off x="9951720" y="6455664"/>
+            <a:ext cx="2011680" cy="292608"/>
+          </a:xfrm>
+          <a:prstGeom prst="rect">
+            <a:avLst/>
+          </a:prstGeom>
+          <a:noFill/>
+        </p:spPr>
+        <p:txBody>
+          <a:bodyPr wrap="none" lIns="0" rIns="0" tIns="0" bIns="0">
+            <a:spAutoFit/>
+          </a:bodyPr>
+          <a:lstStyle/>
+          <a:p>
+            <a:pPr algn="r"/>
+            <a:r>
+              <a:rPr sz="1000">
+                <a:solidFill>
+                  <a:srgbClr val="8A939B"/>
+                </a:solidFill>
+                <a:hlinkClick r:id="rId3"/>
+              </a:rPr>
+              <a:t>cuinotes.com</a:t>
+            </a:r>
+            <a:r>
+              <a:rPr sz="1000">
+                <a:solidFill>
+                  <a:srgbClr val="8A939B"/>
+                </a:solidFill>
+              </a:rPr>
+              <a:t>  ·  3</a:t>
+            </a:r>
           </a:p>
         </p:txBody>
       </p:sp>
@@ -14850,79 +14342,44 @@
       </p:graphicFrame>
       <p:sp>
         <p:nvSpPr>
-          <p:cNvPr id="5" name="Text 2"/>
+          <p:cNvPr id="7" name="cuinotes-footer-mark"/>
           <p:cNvSpPr txBox="1"/>
           <p:nvPr/>
         </p:nvSpPr>
         <p:spPr>
           <a:xfrm>
-            <a:off x="640080" y="6446520"/>
-            <a:ext cx="8686800" cy="292608"/>
-          </a:xfrm>
-          <a:prstGeom prst="rect">
-            <a:avLst/>
-          </a:prstGeom>
-          <a:noFill/>
-          <a:ln/>
-        </p:spPr>
-        <p:txBody>
-          <a:bodyPr wrap="square" lIns="0" tIns="0" rIns="0" bIns="0" rtlCol="0" anchor="ctr"/>
-          <a:lstStyle/>
-          <a:p>
-            <a:pPr algn="l" indent="0" marL="0">
-              <a:buNone/>
-            </a:pPr>
-            <a:r>
-              <a:rPr lang="en-US" sz="900" dirty="0">
-                <a:solidFill>
-                  <a:srgbClr val="5D5D72"/>
-                </a:solidFill>
-                <a:latin typeface="Calibri" pitchFamily="34" charset="0"/>
-                <a:ea typeface="Calibri" pitchFamily="34" charset="-122"/>
-                <a:cs typeface="Calibri" pitchFamily="34" charset="-120"/>
-              </a:rPr>
-              <a:t>Usman Akram  •  COMSATS University Islamabad</a:t>
-            </a:r>
-            <a:endParaRPr lang="en-US" sz="900" dirty="0"/>
-          </a:p>
-        </p:txBody>
-      </p:sp>
-      <p:sp>
-        <p:nvSpPr>
-          <p:cNvPr id="6" name="Text 3"/>
-          <p:cNvSpPr txBox="1"/>
-          <p:nvPr/>
-        </p:nvSpPr>
-        <p:spPr>
-          <a:xfrm>
-            <a:off x="11155680" y="6446520"/>
-            <a:ext cx="457200" cy="292608"/>
-          </a:xfrm>
-          <a:prstGeom prst="rect">
-            <a:avLst/>
-          </a:prstGeom>
-          <a:noFill/>
-          <a:ln/>
-        </p:spPr>
-        <p:txBody>
-          <a:bodyPr wrap="square" lIns="0" tIns="0" rIns="0" bIns="0" rtlCol="0" anchor="ctr"/>
-          <a:lstStyle/>
-          <a:p>
-            <a:pPr algn="r" indent="0" marL="0">
-              <a:buNone/>
-            </a:pPr>
-            <a:r>
-              <a:rPr lang="en-US" sz="900" dirty="0">
-                <a:solidFill>
-                  <a:srgbClr val="5D5D72"/>
-                </a:solidFill>
-                <a:latin typeface="Calibri" pitchFamily="34" charset="0"/>
-                <a:ea typeface="Calibri" pitchFamily="34" charset="-122"/>
-                <a:cs typeface="Calibri" pitchFamily="34" charset="-120"/>
-              </a:rPr>
-              <a:t>4</a:t>
-            </a:r>
-            <a:endParaRPr lang="en-US" sz="900" dirty="0"/>
+            <a:off x="9951720" y="6455664"/>
+            <a:ext cx="2011680" cy="292608"/>
+          </a:xfrm>
+          <a:prstGeom prst="rect">
+            <a:avLst/>
+          </a:prstGeom>
+          <a:noFill/>
+        </p:spPr>
+        <p:txBody>
+          <a:bodyPr wrap="none" lIns="0" rIns="0" tIns="0" bIns="0">
+            <a:spAutoFit/>
+          </a:bodyPr>
+          <a:lstStyle/>
+          <a:p>
+            <a:pPr algn="r"/>
+            <a:r>
+              <a:rPr sz="1000">
+                <a:solidFill>
+                  <a:srgbClr val="8A939B"/>
+                </a:solidFill>
+                <a:hlinkClick r:id="rId3"/>
+              </a:rPr>
+              <a:t>cuinotes.com</a:t>
+            </a:r>
+            <a:r>
+              <a:rPr sz="1000">
+                <a:solidFill>
+                  <a:srgbClr val="8A939B"/>
+                </a:solidFill>
+              </a:rPr>
+              <a:t>  ·  4</a:t>
+            </a:r>
           </a:p>
         </p:txBody>
       </p:sp>
@@ -15062,6 +14519,10 @@
             <a:prstDash val="solid"/>
           </a:ln>
         </p:spPr>
+        <p:txBody>
+          <a:bodyPr/>
+          <a:p/>
+        </p:txBody>
       </p:sp>
       <p:sp>
         <p:nvSpPr>
@@ -15143,79 +14604,44 @@
       </p:sp>
       <p:sp>
         <p:nvSpPr>
-          <p:cNvPr id="7" name="Text 5"/>
+          <p:cNvPr id="9" name="cuinotes-footer-mark"/>
           <p:cNvSpPr txBox="1"/>
           <p:nvPr/>
         </p:nvSpPr>
         <p:spPr>
           <a:xfrm>
-            <a:off x="640080" y="6446520"/>
-            <a:ext cx="8686800" cy="292608"/>
-          </a:xfrm>
-          <a:prstGeom prst="rect">
-            <a:avLst/>
-          </a:prstGeom>
-          <a:noFill/>
-          <a:ln/>
-        </p:spPr>
-        <p:txBody>
-          <a:bodyPr wrap="square" lIns="0" tIns="0" rIns="0" bIns="0" rtlCol="0" anchor="ctr"/>
-          <a:lstStyle/>
-          <a:p>
-            <a:pPr algn="l" indent="0" marL="0">
-              <a:buNone/>
-            </a:pPr>
-            <a:r>
-              <a:rPr lang="en-US" sz="900" dirty="0">
-                <a:solidFill>
-                  <a:srgbClr val="5D5D72"/>
-                </a:solidFill>
-                <a:latin typeface="Calibri" pitchFamily="34" charset="0"/>
-                <a:ea typeface="Calibri" pitchFamily="34" charset="-122"/>
-                <a:cs typeface="Calibri" pitchFamily="34" charset="-120"/>
-              </a:rPr>
-              <a:t>Usman Akram  •  COMSATS University Islamabad</a:t>
-            </a:r>
-            <a:endParaRPr lang="en-US" sz="900" dirty="0"/>
-          </a:p>
-        </p:txBody>
-      </p:sp>
-      <p:sp>
-        <p:nvSpPr>
-          <p:cNvPr id="8" name="Text 6"/>
-          <p:cNvSpPr txBox="1"/>
-          <p:nvPr/>
-        </p:nvSpPr>
-        <p:spPr>
-          <a:xfrm>
-            <a:off x="11155680" y="6446520"/>
-            <a:ext cx="457200" cy="292608"/>
-          </a:xfrm>
-          <a:prstGeom prst="rect">
-            <a:avLst/>
-          </a:prstGeom>
-          <a:noFill/>
-          <a:ln/>
-        </p:spPr>
-        <p:txBody>
-          <a:bodyPr wrap="square" lIns="0" tIns="0" rIns="0" bIns="0" rtlCol="0" anchor="ctr"/>
-          <a:lstStyle/>
-          <a:p>
-            <a:pPr algn="r" indent="0" marL="0">
-              <a:buNone/>
-            </a:pPr>
-            <a:r>
-              <a:rPr lang="en-US" sz="900" dirty="0">
-                <a:solidFill>
-                  <a:srgbClr val="5D5D72"/>
-                </a:solidFill>
-                <a:latin typeface="Calibri" pitchFamily="34" charset="0"/>
-                <a:ea typeface="Calibri" pitchFamily="34" charset="-122"/>
-                <a:cs typeface="Calibri" pitchFamily="34" charset="-120"/>
-              </a:rPr>
-              <a:t>5</a:t>
-            </a:r>
-            <a:endParaRPr lang="en-US" sz="900" dirty="0"/>
+            <a:off x="9951720" y="6455664"/>
+            <a:ext cx="2011680" cy="292608"/>
+          </a:xfrm>
+          <a:prstGeom prst="rect">
+            <a:avLst/>
+          </a:prstGeom>
+          <a:noFill/>
+        </p:spPr>
+        <p:txBody>
+          <a:bodyPr wrap="none" lIns="0" rIns="0" tIns="0" bIns="0">
+            <a:spAutoFit/>
+          </a:bodyPr>
+          <a:lstStyle/>
+          <a:p>
+            <a:pPr algn="r"/>
+            <a:r>
+              <a:rPr sz="1000">
+                <a:solidFill>
+                  <a:srgbClr val="8A939B"/>
+                </a:solidFill>
+                <a:hlinkClick r:id="rId3"/>
+              </a:rPr>
+              <a:t>cuinotes.com</a:t>
+            </a:r>
+            <a:r>
+              <a:rPr sz="1000">
+                <a:solidFill>
+                  <a:srgbClr val="8A939B"/>
+                </a:solidFill>
+              </a:rPr>
+              <a:t>  ·  5</a:t>
+            </a:r>
           </a:p>
         </p:txBody>
       </p:sp>
@@ -16598,79 +16024,44 @@
       </p:graphicFrame>
       <p:sp>
         <p:nvSpPr>
-          <p:cNvPr id="5" name="Text 2"/>
+          <p:cNvPr id="8" name="cuinotes-footer-mark"/>
           <p:cNvSpPr txBox="1"/>
           <p:nvPr/>
         </p:nvSpPr>
         <p:spPr>
           <a:xfrm>
-            <a:off x="640080" y="6446520"/>
-            <a:ext cx="8686800" cy="292608"/>
-          </a:xfrm>
-          <a:prstGeom prst="rect">
-            <a:avLst/>
-          </a:prstGeom>
-          <a:noFill/>
-          <a:ln/>
-        </p:spPr>
-        <p:txBody>
-          <a:bodyPr wrap="square" lIns="0" tIns="0" rIns="0" bIns="0" rtlCol="0" anchor="ctr"/>
-          <a:lstStyle/>
-          <a:p>
-            <a:pPr algn="l" indent="0" marL="0">
-              <a:buNone/>
-            </a:pPr>
-            <a:r>
-              <a:rPr lang="en-US" sz="900" dirty="0">
-                <a:solidFill>
-                  <a:srgbClr val="5D5D72"/>
-                </a:solidFill>
-                <a:latin typeface="Calibri" pitchFamily="34" charset="0"/>
-                <a:ea typeface="Calibri" pitchFamily="34" charset="-122"/>
-                <a:cs typeface="Calibri" pitchFamily="34" charset="-120"/>
-              </a:rPr>
-              <a:t>Usman Akram  •  COMSATS University Islamabad</a:t>
-            </a:r>
-            <a:endParaRPr lang="en-US" sz="900" dirty="0"/>
-          </a:p>
-        </p:txBody>
-      </p:sp>
-      <p:sp>
-        <p:nvSpPr>
-          <p:cNvPr id="6" name="Text 3"/>
-          <p:cNvSpPr txBox="1"/>
-          <p:nvPr/>
-        </p:nvSpPr>
-        <p:spPr>
-          <a:xfrm>
-            <a:off x="11155680" y="6446520"/>
-            <a:ext cx="457200" cy="292608"/>
-          </a:xfrm>
-          <a:prstGeom prst="rect">
-            <a:avLst/>
-          </a:prstGeom>
-          <a:noFill/>
-          <a:ln/>
-        </p:spPr>
-        <p:txBody>
-          <a:bodyPr wrap="square" lIns="0" tIns="0" rIns="0" bIns="0" rtlCol="0" anchor="ctr"/>
-          <a:lstStyle/>
-          <a:p>
-            <a:pPr algn="r" indent="0" marL="0">
-              <a:buNone/>
-            </a:pPr>
-            <a:r>
-              <a:rPr lang="en-US" sz="900" dirty="0">
-                <a:solidFill>
-                  <a:srgbClr val="5D5D72"/>
-                </a:solidFill>
-                <a:latin typeface="Calibri" pitchFamily="34" charset="0"/>
-                <a:ea typeface="Calibri" pitchFamily="34" charset="-122"/>
-                <a:cs typeface="Calibri" pitchFamily="34" charset="-120"/>
-              </a:rPr>
-              <a:t>6</a:t>
-            </a:r>
-            <a:endParaRPr lang="en-US" sz="900" dirty="0"/>
+            <a:off x="9951720" y="6455664"/>
+            <a:ext cx="2011680" cy="292608"/>
+          </a:xfrm>
+          <a:prstGeom prst="rect">
+            <a:avLst/>
+          </a:prstGeom>
+          <a:noFill/>
+        </p:spPr>
+        <p:txBody>
+          <a:bodyPr wrap="none" lIns="0" rIns="0" tIns="0" bIns="0">
+            <a:spAutoFit/>
+          </a:bodyPr>
+          <a:lstStyle/>
+          <a:p>
+            <a:pPr algn="r"/>
+            <a:r>
+              <a:rPr sz="1000">
+                <a:solidFill>
+                  <a:srgbClr val="8A939B"/>
+                </a:solidFill>
+                <a:hlinkClick r:id="rId3"/>
+              </a:rPr>
+              <a:t>cuinotes.com</a:t>
+            </a:r>
+            <a:r>
+              <a:rPr sz="1000">
+                <a:solidFill>
+                  <a:srgbClr val="8A939B"/>
+                </a:solidFill>
+              </a:rPr>
+              <a:t>  ·  6</a:t>
+            </a:r>
           </a:p>
         </p:txBody>
       </p:sp>
@@ -16803,6 +16194,10 @@
           </a:solidFill>
           <a:ln/>
         </p:spPr>
+        <p:txBody>
+          <a:bodyPr/>
+          <a:p/>
+        </p:txBody>
       </p:sp>
       <p:sp>
         <p:nvSpPr>
@@ -16901,6 +16296,10 @@
           </a:solidFill>
           <a:ln/>
         </p:spPr>
+        <p:txBody>
+          <a:bodyPr/>
+          <a:p/>
+        </p:txBody>
       </p:sp>
       <p:sp>
         <p:nvSpPr>
@@ -16999,6 +16398,10 @@
           </a:solidFill>
           <a:ln/>
         </p:spPr>
+        <p:txBody>
+          <a:bodyPr/>
+          <a:p/>
+        </p:txBody>
       </p:sp>
       <p:sp>
         <p:nvSpPr>
@@ -17080,79 +16483,44 @@
       </p:sp>
       <p:sp>
         <p:nvSpPr>
-          <p:cNvPr id="13" name="Text 11"/>
+          <p:cNvPr id="15" name="cuinotes-footer-mark"/>
           <p:cNvSpPr txBox="1"/>
           <p:nvPr/>
         </p:nvSpPr>
         <p:spPr>
           <a:xfrm>
-            <a:off x="640080" y="6446520"/>
-            <a:ext cx="8686800" cy="292608"/>
-          </a:xfrm>
-          <a:prstGeom prst="rect">
-            <a:avLst/>
-          </a:prstGeom>
-          <a:noFill/>
-          <a:ln/>
-        </p:spPr>
-        <p:txBody>
-          <a:bodyPr wrap="square" lIns="0" tIns="0" rIns="0" bIns="0" rtlCol="0" anchor="ctr"/>
-          <a:lstStyle/>
-          <a:p>
-            <a:pPr algn="l" indent="0" marL="0">
-              <a:buNone/>
-            </a:pPr>
-            <a:r>
-              <a:rPr lang="en-US" sz="900" dirty="0">
-                <a:solidFill>
-                  <a:srgbClr val="5D5D72"/>
-                </a:solidFill>
-                <a:latin typeface="Calibri" pitchFamily="34" charset="0"/>
-                <a:ea typeface="Calibri" pitchFamily="34" charset="-122"/>
-                <a:cs typeface="Calibri" pitchFamily="34" charset="-120"/>
-              </a:rPr>
-              <a:t>Usman Akram  •  COMSATS University Islamabad</a:t>
-            </a:r>
-            <a:endParaRPr lang="en-US" sz="900" dirty="0"/>
-          </a:p>
-        </p:txBody>
-      </p:sp>
-      <p:sp>
-        <p:nvSpPr>
-          <p:cNvPr id="14" name="Text 12"/>
-          <p:cNvSpPr txBox="1"/>
-          <p:nvPr/>
-        </p:nvSpPr>
-        <p:spPr>
-          <a:xfrm>
-            <a:off x="11155680" y="6446520"/>
-            <a:ext cx="457200" cy="292608"/>
-          </a:xfrm>
-          <a:prstGeom prst="rect">
-            <a:avLst/>
-          </a:prstGeom>
-          <a:noFill/>
-          <a:ln/>
-        </p:spPr>
-        <p:txBody>
-          <a:bodyPr wrap="square" lIns="0" tIns="0" rIns="0" bIns="0" rtlCol="0" anchor="ctr"/>
-          <a:lstStyle/>
-          <a:p>
-            <a:pPr algn="r" indent="0" marL="0">
-              <a:buNone/>
-            </a:pPr>
-            <a:r>
-              <a:rPr lang="en-US" sz="900" dirty="0">
-                <a:solidFill>
-                  <a:srgbClr val="5D5D72"/>
-                </a:solidFill>
-                <a:latin typeface="Calibri" pitchFamily="34" charset="0"/>
-                <a:ea typeface="Calibri" pitchFamily="34" charset="-122"/>
-                <a:cs typeface="Calibri" pitchFamily="34" charset="-120"/>
-              </a:rPr>
-              <a:t>7</a:t>
-            </a:r>
-            <a:endParaRPr lang="en-US" sz="900" dirty="0"/>
+            <a:off x="9951720" y="6455664"/>
+            <a:ext cx="2011680" cy="292608"/>
+          </a:xfrm>
+          <a:prstGeom prst="rect">
+            <a:avLst/>
+          </a:prstGeom>
+          <a:noFill/>
+        </p:spPr>
+        <p:txBody>
+          <a:bodyPr wrap="none" lIns="0" rIns="0" tIns="0" bIns="0">
+            <a:spAutoFit/>
+          </a:bodyPr>
+          <a:lstStyle/>
+          <a:p>
+            <a:pPr algn="r"/>
+            <a:r>
+              <a:rPr sz="1000">
+                <a:solidFill>
+                  <a:srgbClr val="8A939B"/>
+                </a:solidFill>
+                <a:hlinkClick r:id="rId3"/>
+              </a:rPr>
+              <a:t>cuinotes.com</a:t>
+            </a:r>
+            <a:r>
+              <a:rPr sz="1000">
+                <a:solidFill>
+                  <a:srgbClr val="8A939B"/>
+                </a:solidFill>
+              </a:rPr>
+              <a:t>  ·  7</a:t>
+            </a:r>
           </a:p>
         </p:txBody>
       </p:sp>
@@ -17289,6 +16657,10 @@
             <a:tailEnd type="triangle"/>
           </a:ln>
         </p:spPr>
+        <p:txBody>
+          <a:bodyPr/>
+          <a:p/>
+        </p:txBody>
       </p:sp>
       <p:sp>
         <p:nvSpPr>
@@ -17313,6 +16685,10 @@
             <a:tailEnd type="triangle"/>
           </a:ln>
         </p:spPr>
+        <p:txBody>
+          <a:bodyPr/>
+          <a:p/>
+        </p:txBody>
       </p:sp>
       <p:sp>
         <p:nvSpPr>
@@ -17378,6 +16754,10 @@
             <a:tailEnd type="triangle"/>
           </a:ln>
         </p:spPr>
+        <p:txBody>
+          <a:bodyPr/>
+          <a:p/>
+        </p:txBody>
       </p:sp>
       <p:sp>
         <p:nvSpPr>
@@ -17443,6 +16823,10 @@
             <a:tailEnd type="triangle"/>
           </a:ln>
         </p:spPr>
+        <p:txBody>
+          <a:bodyPr/>
+          <a:p/>
+        </p:txBody>
       </p:sp>
       <p:sp>
         <p:nvSpPr>
@@ -17508,6 +16892,10 @@
             <a:tailEnd type="triangle"/>
           </a:ln>
         </p:spPr>
+        <p:txBody>
+          <a:bodyPr/>
+          <a:p/>
+        </p:txBody>
       </p:sp>
       <p:sp>
         <p:nvSpPr>
@@ -17573,6 +16961,10 @@
             <a:tailEnd type="triangle"/>
           </a:ln>
         </p:spPr>
+        <p:txBody>
+          <a:bodyPr/>
+          <a:p/>
+        </p:txBody>
       </p:sp>
       <p:sp>
         <p:nvSpPr>
@@ -17597,6 +16989,10 @@
             <a:tailEnd type="triangle"/>
           </a:ln>
         </p:spPr>
+        <p:txBody>
+          <a:bodyPr/>
+          <a:p/>
+        </p:txBody>
       </p:sp>
       <p:sp>
         <p:nvSpPr>
@@ -17621,6 +17017,10 @@
             <a:tailEnd type="triangle"/>
           </a:ln>
         </p:spPr>
+        <p:txBody>
+          <a:bodyPr/>
+          <a:p/>
+        </p:txBody>
       </p:sp>
       <p:sp>
         <p:nvSpPr>
@@ -17645,6 +17045,10 @@
             <a:tailEnd type="triangle"/>
           </a:ln>
         </p:spPr>
+        <p:txBody>
+          <a:bodyPr/>
+          <a:p/>
+        </p:txBody>
       </p:sp>
       <p:sp>
         <p:nvSpPr>
@@ -17665,6 +17069,10 @@
           </a:solidFill>
           <a:ln/>
         </p:spPr>
+        <p:txBody>
+          <a:bodyPr/>
+          <a:p/>
+        </p:txBody>
       </p:sp>
       <p:sp>
         <p:nvSpPr>
@@ -17727,6 +17135,10 @@
           </a:solidFill>
           <a:ln/>
         </p:spPr>
+        <p:txBody>
+          <a:bodyPr/>
+          <a:p/>
+        </p:txBody>
       </p:sp>
       <p:sp>
         <p:nvSpPr>
@@ -17789,6 +17201,10 @@
           </a:solidFill>
           <a:ln/>
         </p:spPr>
+        <p:txBody>
+          <a:bodyPr/>
+          <a:p/>
+        </p:txBody>
       </p:sp>
       <p:sp>
         <p:nvSpPr>
@@ -17871,6 +17287,10 @@
           </a:solidFill>
           <a:ln/>
         </p:spPr>
+        <p:txBody>
+          <a:bodyPr/>
+          <a:p/>
+        </p:txBody>
       </p:sp>
       <p:sp>
         <p:nvSpPr>
@@ -17953,6 +17373,10 @@
           </a:solidFill>
           <a:ln/>
         </p:spPr>
+        <p:txBody>
+          <a:bodyPr/>
+          <a:p/>
+        </p:txBody>
       </p:sp>
       <p:sp>
         <p:nvSpPr>
@@ -18035,6 +17459,10 @@
           </a:solidFill>
           <a:ln/>
         </p:spPr>
+        <p:txBody>
+          <a:bodyPr/>
+          <a:p/>
+        </p:txBody>
       </p:sp>
       <p:sp>
         <p:nvSpPr>
@@ -18117,6 +17545,10 @@
           </a:solidFill>
           <a:ln/>
         </p:spPr>
+        <p:txBody>
+          <a:bodyPr/>
+          <a:p/>
+        </p:txBody>
       </p:sp>
       <p:sp>
         <p:nvSpPr>
@@ -18162,79 +17594,44 @@
       </p:sp>
       <p:sp>
         <p:nvSpPr>
-          <p:cNvPr id="31" name="Text 29"/>
+          <p:cNvPr id="33" name="cuinotes-footer-mark"/>
           <p:cNvSpPr txBox="1"/>
           <p:nvPr/>
         </p:nvSpPr>
         <p:spPr>
           <a:xfrm>
-            <a:off x="640080" y="6446520"/>
-            <a:ext cx="8686800" cy="292608"/>
-          </a:xfrm>
-          <a:prstGeom prst="rect">
-            <a:avLst/>
-          </a:prstGeom>
-          <a:noFill/>
-          <a:ln/>
-        </p:spPr>
-        <p:txBody>
-          <a:bodyPr wrap="square" lIns="0" tIns="0" rIns="0" bIns="0" rtlCol="0" anchor="ctr"/>
-          <a:lstStyle/>
-          <a:p>
-            <a:pPr algn="l" indent="0" marL="0">
-              <a:buNone/>
-            </a:pPr>
-            <a:r>
-              <a:rPr lang="en-US" sz="900" dirty="0">
-                <a:solidFill>
-                  <a:srgbClr val="5D5D72"/>
-                </a:solidFill>
-                <a:latin typeface="Calibri" pitchFamily="34" charset="0"/>
-                <a:ea typeface="Calibri" pitchFamily="34" charset="-122"/>
-                <a:cs typeface="Calibri" pitchFamily="34" charset="-120"/>
-              </a:rPr>
-              <a:t>Usman Akram  •  COMSATS University Islamabad</a:t>
-            </a:r>
-            <a:endParaRPr lang="en-US" sz="900" dirty="0"/>
-          </a:p>
-        </p:txBody>
-      </p:sp>
-      <p:sp>
-        <p:nvSpPr>
-          <p:cNvPr id="32" name="Text 30"/>
-          <p:cNvSpPr txBox="1"/>
-          <p:nvPr/>
-        </p:nvSpPr>
-        <p:spPr>
-          <a:xfrm>
-            <a:off x="11155680" y="6446520"/>
-            <a:ext cx="457200" cy="292608"/>
-          </a:xfrm>
-          <a:prstGeom prst="rect">
-            <a:avLst/>
-          </a:prstGeom>
-          <a:noFill/>
-          <a:ln/>
-        </p:spPr>
-        <p:txBody>
-          <a:bodyPr wrap="square" lIns="0" tIns="0" rIns="0" bIns="0" rtlCol="0" anchor="ctr"/>
-          <a:lstStyle/>
-          <a:p>
-            <a:pPr algn="r" indent="0" marL="0">
-              <a:buNone/>
-            </a:pPr>
-            <a:r>
-              <a:rPr lang="en-US" sz="900" dirty="0">
-                <a:solidFill>
-                  <a:srgbClr val="5D5D72"/>
-                </a:solidFill>
-                <a:latin typeface="Calibri" pitchFamily="34" charset="0"/>
-                <a:ea typeface="Calibri" pitchFamily="34" charset="-122"/>
-                <a:cs typeface="Calibri" pitchFamily="34" charset="-120"/>
-              </a:rPr>
-              <a:t>8</a:t>
-            </a:r>
-            <a:endParaRPr lang="en-US" sz="900" dirty="0"/>
+            <a:off x="9951720" y="6455664"/>
+            <a:ext cx="2011680" cy="292608"/>
+          </a:xfrm>
+          <a:prstGeom prst="rect">
+            <a:avLst/>
+          </a:prstGeom>
+          <a:noFill/>
+        </p:spPr>
+        <p:txBody>
+          <a:bodyPr wrap="none" lIns="0" rIns="0" tIns="0" bIns="0">
+            <a:spAutoFit/>
+          </a:bodyPr>
+          <a:lstStyle/>
+          <a:p>
+            <a:pPr algn="r"/>
+            <a:r>
+              <a:rPr sz="1000">
+                <a:solidFill>
+                  <a:srgbClr val="8A939B"/>
+                </a:solidFill>
+                <a:hlinkClick r:id="rId3"/>
+              </a:rPr>
+              <a:t>cuinotes.com</a:t>
+            </a:r>
+            <a:r>
+              <a:rPr sz="1000">
+                <a:solidFill>
+                  <a:srgbClr val="8A939B"/>
+                </a:solidFill>
+              </a:rPr>
+              <a:t>  ·  8</a:t>
+            </a:r>
           </a:p>
         </p:txBody>
       </p:sp>
@@ -18369,6 +17766,10 @@
           </a:solidFill>
           <a:ln/>
         </p:spPr>
+        <p:txBody>
+          <a:bodyPr/>
+          <a:p/>
+        </p:txBody>
       </p:sp>
       <p:sp>
         <p:nvSpPr>
@@ -18623,79 +18024,44 @@
       </p:sp>
       <p:sp>
         <p:nvSpPr>
-          <p:cNvPr id="6" name="Text 4"/>
+          <p:cNvPr id="8" name="cuinotes-footer-mark"/>
           <p:cNvSpPr txBox="1"/>
           <p:nvPr/>
         </p:nvSpPr>
         <p:spPr>
           <a:xfrm>
-            <a:off x="640080" y="6446520"/>
-            <a:ext cx="8686800" cy="292608"/>
-          </a:xfrm>
-          <a:prstGeom prst="rect">
-            <a:avLst/>
-          </a:prstGeom>
-          <a:noFill/>
-          <a:ln/>
-        </p:spPr>
-        <p:txBody>
-          <a:bodyPr wrap="square" lIns="0" tIns="0" rIns="0" bIns="0" rtlCol="0" anchor="ctr"/>
-          <a:lstStyle/>
-          <a:p>
-            <a:pPr algn="l" indent="0" marL="0">
-              <a:buNone/>
-            </a:pPr>
-            <a:r>
-              <a:rPr lang="en-US" sz="900" dirty="0">
-                <a:solidFill>
-                  <a:srgbClr val="5D5D72"/>
-                </a:solidFill>
-                <a:latin typeface="Calibri" pitchFamily="34" charset="0"/>
-                <a:ea typeface="Calibri" pitchFamily="34" charset="-122"/>
-                <a:cs typeface="Calibri" pitchFamily="34" charset="-120"/>
-              </a:rPr>
-              <a:t>Usman Akram  •  COMSATS University Islamabad</a:t>
-            </a:r>
-            <a:endParaRPr lang="en-US" sz="900" dirty="0"/>
-          </a:p>
-        </p:txBody>
-      </p:sp>
-      <p:sp>
-        <p:nvSpPr>
-          <p:cNvPr id="7" name="Text 5"/>
-          <p:cNvSpPr txBox="1"/>
-          <p:nvPr/>
-        </p:nvSpPr>
-        <p:spPr>
-          <a:xfrm>
-            <a:off x="11155680" y="6446520"/>
-            <a:ext cx="457200" cy="292608"/>
-          </a:xfrm>
-          <a:prstGeom prst="rect">
-            <a:avLst/>
-          </a:prstGeom>
-          <a:noFill/>
-          <a:ln/>
-        </p:spPr>
-        <p:txBody>
-          <a:bodyPr wrap="square" lIns="0" tIns="0" rIns="0" bIns="0" rtlCol="0" anchor="ctr"/>
-          <a:lstStyle/>
-          <a:p>
-            <a:pPr algn="r" indent="0" marL="0">
-              <a:buNone/>
-            </a:pPr>
-            <a:r>
-              <a:rPr lang="en-US" sz="900" dirty="0">
-                <a:solidFill>
-                  <a:srgbClr val="5D5D72"/>
-                </a:solidFill>
-                <a:latin typeface="Calibri" pitchFamily="34" charset="0"/>
-                <a:ea typeface="Calibri" pitchFamily="34" charset="-122"/>
-                <a:cs typeface="Calibri" pitchFamily="34" charset="-120"/>
-              </a:rPr>
-              <a:t>9</a:t>
-            </a:r>
-            <a:endParaRPr lang="en-US" sz="900" dirty="0"/>
+            <a:off x="9951720" y="6455664"/>
+            <a:ext cx="2011680" cy="292608"/>
+          </a:xfrm>
+          <a:prstGeom prst="rect">
+            <a:avLst/>
+          </a:prstGeom>
+          <a:noFill/>
+        </p:spPr>
+        <p:txBody>
+          <a:bodyPr wrap="none" lIns="0" rIns="0" tIns="0" bIns="0">
+            <a:spAutoFit/>
+          </a:bodyPr>
+          <a:lstStyle/>
+          <a:p>
+            <a:pPr algn="r"/>
+            <a:r>
+              <a:rPr sz="1000">
+                <a:solidFill>
+                  <a:srgbClr val="8A939B"/>
+                </a:solidFill>
+                <a:hlinkClick r:id="rId3"/>
+              </a:rPr>
+              <a:t>cuinotes.com</a:t>
+            </a:r>
+            <a:r>
+              <a:rPr sz="1000">
+                <a:solidFill>
+                  <a:srgbClr val="8A939B"/>
+                </a:solidFill>
+              </a:rPr>
+              <a:t>  ·  9</a:t>
+            </a:r>
           </a:p>
         </p:txBody>
       </p:sp>

--- a/slides/CSC336-Lecture-25-REST-API-Development-and-Authentication.pptx
+++ b/slides/CSC336-Lecture-25-REST-API-Development-and-Authentication.pptx
@@ -3449,9 +3449,13 @@
             </a:avLst>
           </a:prstGeom>
           <a:solidFill>
-            <a:srgbClr val="1E1E4C"/>
+            <a:srgbClr val="F7F8F9"/>
           </a:solidFill>
-          <a:ln/>
+          <a:ln w="9525">
+            <a:solidFill>
+              <a:srgbClr val="D0D5DD"/>
+            </a:solidFill>
+          </a:ln>
         </p:spPr>
         <p:txBody>
           <a:bodyPr/>
@@ -3488,7 +3492,7 @@
             <a:r>
               <a:rPr lang="en-US" sz="1110" dirty="0">
                 <a:solidFill>
-                  <a:srgbClr val="C9D3F5"/>
+                  <a:srgbClr val="1F2429"/>
                 </a:solidFill>
                 <a:latin typeface="Courier New" pitchFamily="34" charset="0"/>
                 <a:ea typeface="Courier New" pitchFamily="34" charset="-122"/>
@@ -3508,7 +3512,7 @@
             <a:r>
               <a:rPr lang="en-US" sz="1110" dirty="0">
                 <a:solidFill>
-                  <a:srgbClr val="C9D3F5"/>
+                  <a:srgbClr val="1F2429"/>
                 </a:solidFill>
                 <a:latin typeface="Courier New" pitchFamily="34" charset="0"/>
                 <a:ea typeface="Courier New" pitchFamily="34" charset="-122"/>
@@ -3528,7 +3532,7 @@
             <a:r>
               <a:rPr lang="en-US" sz="1110" dirty="0">
                 <a:solidFill>
-                  <a:srgbClr val="C9D3F5"/>
+                  <a:srgbClr val="1F2429"/>
                 </a:solidFill>
                 <a:latin typeface="Courier New" pitchFamily="34" charset="0"/>
                 <a:ea typeface="Courier New" pitchFamily="34" charset="-122"/>
@@ -3548,7 +3552,7 @@
             <a:r>
               <a:rPr lang="en-US" sz="1110" dirty="0">
                 <a:solidFill>
-                  <a:srgbClr val="C9D3F5"/>
+                  <a:srgbClr val="1F2429"/>
                 </a:solidFill>
                 <a:latin typeface="Courier New" pitchFamily="34" charset="0"/>
                 <a:ea typeface="Courier New" pitchFamily="34" charset="-122"/>
@@ -3568,7 +3572,7 @@
             <a:r>
               <a:rPr lang="en-US" sz="1110" dirty="0">
                 <a:solidFill>
-                  <a:srgbClr val="C9D3F5"/>
+                  <a:srgbClr val="1F2429"/>
                 </a:solidFill>
                 <a:latin typeface="Courier New" pitchFamily="34" charset="0"/>
                 <a:ea typeface="Courier New" pitchFamily="34" charset="-122"/>
@@ -3588,7 +3592,7 @@
             <a:r>
               <a:rPr lang="en-US" sz="1110" dirty="0">
                 <a:solidFill>
-                  <a:srgbClr val="C9D3F5"/>
+                  <a:srgbClr val="1F2429"/>
                 </a:solidFill>
                 <a:latin typeface="Courier New" pitchFamily="34" charset="0"/>
                 <a:ea typeface="Courier New" pitchFamily="34" charset="-122"/>
@@ -3608,7 +3612,7 @@
             <a:r>
               <a:rPr lang="en-US" sz="1110" dirty="0">
                 <a:solidFill>
-                  <a:srgbClr val="C9D3F5"/>
+                  <a:srgbClr val="1F2429"/>
                 </a:solidFill>
                 <a:latin typeface="Courier New" pitchFamily="34" charset="0"/>
                 <a:ea typeface="Courier New" pitchFamily="34" charset="-122"/>
@@ -3628,7 +3632,7 @@
             <a:r>
               <a:rPr lang="en-US" sz="1110" dirty="0">
                 <a:solidFill>
-                  <a:srgbClr val="C9D3F5"/>
+                  <a:srgbClr val="1F2429"/>
                 </a:solidFill>
                 <a:latin typeface="Courier New" pitchFamily="34" charset="0"/>
                 <a:ea typeface="Courier New" pitchFamily="34" charset="-122"/>
@@ -3648,7 +3652,7 @@
             <a:r>
               <a:rPr lang="en-US" sz="1110" dirty="0">
                 <a:solidFill>
-                  <a:srgbClr val="C9D3F5"/>
+                  <a:srgbClr val="1F2429"/>
                 </a:solidFill>
                 <a:latin typeface="Courier New" pitchFamily="34" charset="0"/>
                 <a:ea typeface="Courier New" pitchFamily="34" charset="-122"/>
@@ -3677,7 +3681,7 @@
             <a:r>
               <a:rPr lang="en-US" sz="1110" dirty="0">
                 <a:solidFill>
-                  <a:srgbClr val="C9D3F5"/>
+                  <a:srgbClr val="1F2429"/>
                 </a:solidFill>
                 <a:latin typeface="Courier New" pitchFamily="34" charset="0"/>
                 <a:ea typeface="Courier New" pitchFamily="34" charset="-122"/>
@@ -3697,7 +3701,7 @@
             <a:r>
               <a:rPr lang="en-US" sz="1110" dirty="0">
                 <a:solidFill>
-                  <a:srgbClr val="C9D3F5"/>
+                  <a:srgbClr val="1F2429"/>
                 </a:solidFill>
                 <a:latin typeface="Courier New" pitchFamily="34" charset="0"/>
                 <a:ea typeface="Courier New" pitchFamily="34" charset="-122"/>
@@ -3717,7 +3721,7 @@
             <a:r>
               <a:rPr lang="en-US" sz="1110" dirty="0">
                 <a:solidFill>
-                  <a:srgbClr val="C9D3F5"/>
+                  <a:srgbClr val="1F2429"/>
                 </a:solidFill>
                 <a:latin typeface="Courier New" pitchFamily="34" charset="0"/>
                 <a:ea typeface="Courier New" pitchFamily="34" charset="-122"/>
@@ -3737,7 +3741,7 @@
             <a:r>
               <a:rPr lang="en-US" sz="1110" dirty="0">
                 <a:solidFill>
-                  <a:srgbClr val="C9D3F5"/>
+                  <a:srgbClr val="1F2429"/>
                 </a:solidFill>
                 <a:latin typeface="Courier New" pitchFamily="34" charset="0"/>
                 <a:ea typeface="Courier New" pitchFamily="34" charset="-122"/>
@@ -3757,7 +3761,7 @@
             <a:r>
               <a:rPr lang="en-US" sz="1110" dirty="0">
                 <a:solidFill>
-                  <a:srgbClr val="C9D3F5"/>
+                  <a:srgbClr val="1F2429"/>
                 </a:solidFill>
                 <a:latin typeface="Courier New" pitchFamily="34" charset="0"/>
                 <a:ea typeface="Courier New" pitchFamily="34" charset="-122"/>
@@ -3777,7 +3781,7 @@
             <a:r>
               <a:rPr lang="en-US" sz="1110" dirty="0">
                 <a:solidFill>
-                  <a:srgbClr val="C9D3F5"/>
+                  <a:srgbClr val="1F2429"/>
                 </a:solidFill>
                 <a:latin typeface="Courier New" pitchFamily="34" charset="0"/>
                 <a:ea typeface="Courier New" pitchFamily="34" charset="-122"/>
@@ -3951,7 +3955,7 @@
         <p:spPr>
           <a:xfrm>
             <a:off x="640080" y="1965960"/>
-            <a:ext cx="10911535" cy="1828800"/>
+            <a:ext cx="10911535" cy="3657600"/>
           </a:xfrm>
           <a:prstGeom prst="roundRect">
             <a:avLst>
@@ -3982,7 +3986,7 @@
         <p:spPr>
           <a:xfrm>
             <a:off x="868680" y="2103120"/>
-            <a:ext cx="10454335" cy="274320"/>
+            <a:ext cx="10454335" cy="400000"/>
           </a:xfrm>
           <a:prstGeom prst="rect">
             <a:avLst/>
@@ -3998,7 +4002,7 @@
               <a:buNone/>
             </a:pPr>
             <a:r>
-              <a:rPr lang="en-US" sz="1000" b="1" spc="200" kern="0" dirty="0">
+              <a:rPr lang="en-US" sz="1800" b="1" spc="200" kern="0" dirty="0">
                 <a:solidFill>
                   <a:srgbClr val="33459E"/>
                 </a:solidFill>
@@ -4008,7 +4012,7 @@
               </a:rPr>
               <a:t>NOTE</a:t>
             </a:r>
-            <a:endParaRPr lang="en-US" sz="1000" dirty="0"/>
+            <a:endParaRPr lang="en-US" sz="1800" dirty="0"/>
           </a:p>
         </p:txBody>
       </p:sp>
@@ -4020,24 +4024,24 @@
         </p:nvSpPr>
         <p:spPr>
           <a:xfrm>
-            <a:off x="868680" y="2404872"/>
-            <a:ext cx="10454335" cy="1234440"/>
-          </a:xfrm>
-          <a:prstGeom prst="rect">
-            <a:avLst/>
-          </a:prstGeom>
-          <a:noFill/>
-          <a:ln/>
-        </p:spPr>
-        <p:txBody>
-          <a:bodyPr wrap="square" lIns="0" tIns="0" rIns="0" bIns="0" rtlCol="0" anchor="t"/>
+            <a:off x="868680" y="2795960"/>
+            <a:ext cx="10454335" cy="2500000"/>
+          </a:xfrm>
+          <a:prstGeom prst="rect">
+            <a:avLst/>
+          </a:prstGeom>
+          <a:noFill/>
+          <a:ln/>
+        </p:spPr>
+        <p:txBody>
+          <a:bodyPr wrap="square" lIns="0" tIns="0" rIns="0" bIns="0" rtlCol="0" anchor="ctr"/>
           <a:lstStyle/>
           <a:p>
             <a:pPr indent="0" marL="0">
               <a:buNone/>
             </a:pPr>
             <a:r>
-              <a:rPr lang="en-US" sz="1250" dirty="0">
+              <a:rPr lang="en-US" sz="2800" dirty="0">
                 <a:solidFill>
                   <a:srgbClr val="26262F"/>
                 </a:solidFill>
@@ -4047,7 +4051,7 @@
               </a:rPr>
               <a:t>Successful responses wrap the payload in { data: ... }, errors use { error: ... }, and the status code always matches what happened (200 OK, 201 Created, 204 No Content, 404 Not Found, 400 Bad Request). One shape, every endpoint.</a:t>
             </a:r>
-            <a:endParaRPr lang="en-US" sz="1250" dirty="0"/>
+            <a:endParaRPr lang="en-US" sz="2800" dirty="0"/>
           </a:p>
         </p:txBody>
       </p:sp>
@@ -6205,9 +6209,13 @@
             </a:avLst>
           </a:prstGeom>
           <a:solidFill>
-            <a:srgbClr val="1E1E4C"/>
+            <a:srgbClr val="F7F8F9"/>
           </a:solidFill>
-          <a:ln/>
+          <a:ln w="9525">
+            <a:solidFill>
+              <a:srgbClr val="D0D5DD"/>
+            </a:solidFill>
+          </a:ln>
         </p:spPr>
         <p:txBody>
           <a:bodyPr/>
@@ -6244,7 +6252,7 @@
             <a:r>
               <a:rPr lang="en-US" sz="1045" dirty="0">
                 <a:solidFill>
-                  <a:srgbClr val="C9D3F5"/>
+                  <a:srgbClr val="1F2429"/>
                 </a:solidFill>
                 <a:latin typeface="Courier New" pitchFamily="34" charset="0"/>
                 <a:ea typeface="Courier New" pitchFamily="34" charset="-122"/>
@@ -6273,7 +6281,7 @@
             <a:r>
               <a:rPr lang="en-US" sz="1045" dirty="0">
                 <a:solidFill>
-                  <a:srgbClr val="C9D3F5"/>
+                  <a:srgbClr val="1F2429"/>
                 </a:solidFill>
                 <a:latin typeface="Courier New" pitchFamily="34" charset="0"/>
                 <a:ea typeface="Courier New" pitchFamily="34" charset="-122"/>
@@ -6293,7 +6301,7 @@
             <a:r>
               <a:rPr lang="en-US" sz="1045" dirty="0">
                 <a:solidFill>
-                  <a:srgbClr val="C9D3F5"/>
+                  <a:srgbClr val="1F2429"/>
                 </a:solidFill>
                 <a:latin typeface="Courier New" pitchFamily="34" charset="0"/>
                 <a:ea typeface="Courier New" pitchFamily="34" charset="-122"/>
@@ -6313,7 +6321,7 @@
             <a:r>
               <a:rPr lang="en-US" sz="1045" dirty="0">
                 <a:solidFill>
-                  <a:srgbClr val="C9D3F5"/>
+                  <a:srgbClr val="1F2429"/>
                 </a:solidFill>
                 <a:latin typeface="Courier New" pitchFamily="34" charset="0"/>
                 <a:ea typeface="Courier New" pitchFamily="34" charset="-122"/>
@@ -6333,7 +6341,7 @@
             <a:r>
               <a:rPr lang="en-US" sz="1045" dirty="0">
                 <a:solidFill>
-                  <a:srgbClr val="C9D3F5"/>
+                  <a:srgbClr val="1F2429"/>
                 </a:solidFill>
                 <a:latin typeface="Courier New" pitchFamily="34" charset="0"/>
                 <a:ea typeface="Courier New" pitchFamily="34" charset="-122"/>
@@ -6353,7 +6361,7 @@
             <a:r>
               <a:rPr lang="en-US" sz="1045" dirty="0">
                 <a:solidFill>
-                  <a:srgbClr val="C9D3F5"/>
+                  <a:srgbClr val="1F2429"/>
                 </a:solidFill>
                 <a:latin typeface="Courier New" pitchFamily="34" charset="0"/>
                 <a:ea typeface="Courier New" pitchFamily="34" charset="-122"/>
@@ -6373,7 +6381,7 @@
             <a:r>
               <a:rPr lang="en-US" sz="1045" dirty="0">
                 <a:solidFill>
-                  <a:srgbClr val="C9D3F5"/>
+                  <a:srgbClr val="1F2429"/>
                 </a:solidFill>
                 <a:latin typeface="Courier New" pitchFamily="34" charset="0"/>
                 <a:ea typeface="Courier New" pitchFamily="34" charset="-122"/>
@@ -6393,7 +6401,7 @@
             <a:r>
               <a:rPr lang="en-US" sz="1045" dirty="0">
                 <a:solidFill>
-                  <a:srgbClr val="C9D3F5"/>
+                  <a:srgbClr val="1F2429"/>
                 </a:solidFill>
                 <a:latin typeface="Courier New" pitchFamily="34" charset="0"/>
                 <a:ea typeface="Courier New" pitchFamily="34" charset="-122"/>
@@ -6422,7 +6430,7 @@
             <a:r>
               <a:rPr lang="en-US" sz="1045" dirty="0">
                 <a:solidFill>
-                  <a:srgbClr val="C9D3F5"/>
+                  <a:srgbClr val="1F2429"/>
                 </a:solidFill>
                 <a:latin typeface="Courier New" pitchFamily="34" charset="0"/>
                 <a:ea typeface="Courier New" pitchFamily="34" charset="-122"/>
@@ -6442,7 +6450,7 @@
             <a:r>
               <a:rPr lang="en-US" sz="1045" dirty="0">
                 <a:solidFill>
-                  <a:srgbClr val="C9D3F5"/>
+                  <a:srgbClr val="1F2429"/>
                 </a:solidFill>
                 <a:latin typeface="Courier New" pitchFamily="34" charset="0"/>
                 <a:ea typeface="Courier New" pitchFamily="34" charset="-122"/>
@@ -6462,7 +6470,7 @@
             <a:r>
               <a:rPr lang="en-US" sz="1045" dirty="0">
                 <a:solidFill>
-                  <a:srgbClr val="C9D3F5"/>
+                  <a:srgbClr val="1F2429"/>
                 </a:solidFill>
                 <a:latin typeface="Courier New" pitchFamily="34" charset="0"/>
                 <a:ea typeface="Courier New" pitchFamily="34" charset="-122"/>
@@ -6482,7 +6490,7 @@
             <a:r>
               <a:rPr lang="en-US" sz="1045" dirty="0">
                 <a:solidFill>
-                  <a:srgbClr val="C9D3F5"/>
+                  <a:srgbClr val="1F2429"/>
                 </a:solidFill>
                 <a:latin typeface="Courier New" pitchFamily="34" charset="0"/>
                 <a:ea typeface="Courier New" pitchFamily="34" charset="-122"/>
@@ -6502,7 +6510,7 @@
             <a:r>
               <a:rPr lang="en-US" sz="1045" dirty="0">
                 <a:solidFill>
-                  <a:srgbClr val="C9D3F5"/>
+                  <a:srgbClr val="1F2429"/>
                 </a:solidFill>
                 <a:latin typeface="Courier New" pitchFamily="34" charset="0"/>
                 <a:ea typeface="Courier New" pitchFamily="34" charset="-122"/>
@@ -6522,7 +6530,7 @@
             <a:r>
               <a:rPr lang="en-US" sz="1045" dirty="0">
                 <a:solidFill>
-                  <a:srgbClr val="C9D3F5"/>
+                  <a:srgbClr val="1F2429"/>
                 </a:solidFill>
                 <a:latin typeface="Courier New" pitchFamily="34" charset="0"/>
                 <a:ea typeface="Courier New" pitchFamily="34" charset="-122"/>
@@ -6542,7 +6550,7 @@
             <a:r>
               <a:rPr lang="en-US" sz="1045" dirty="0">
                 <a:solidFill>
-                  <a:srgbClr val="C9D3F5"/>
+                  <a:srgbClr val="1F2429"/>
                 </a:solidFill>
                 <a:latin typeface="Courier New" pitchFamily="34" charset="0"/>
                 <a:ea typeface="Courier New" pitchFamily="34" charset="-122"/>
@@ -6724,9 +6732,13 @@
             </a:avLst>
           </a:prstGeom>
           <a:solidFill>
-            <a:srgbClr val="1E1E4C"/>
+            <a:srgbClr val="F7F8F9"/>
           </a:solidFill>
-          <a:ln/>
+          <a:ln w="9525">
+            <a:solidFill>
+              <a:srgbClr val="D0D5DD"/>
+            </a:solidFill>
+          </a:ln>
         </p:spPr>
         <p:txBody>
           <a:bodyPr/>
@@ -6763,7 +6775,7 @@
             <a:r>
               <a:rPr lang="en-US" sz="1269" dirty="0">
                 <a:solidFill>
-                  <a:srgbClr val="C9D3F5"/>
+                  <a:srgbClr val="1F2429"/>
                 </a:solidFill>
                 <a:latin typeface="Courier New" pitchFamily="34" charset="0"/>
                 <a:ea typeface="Courier New" pitchFamily="34" charset="-122"/>
@@ -6783,7 +6795,7 @@
             <a:r>
               <a:rPr lang="en-US" sz="1269" dirty="0">
                 <a:solidFill>
-                  <a:srgbClr val="C9D3F5"/>
+                  <a:srgbClr val="1F2429"/>
                 </a:solidFill>
                 <a:latin typeface="Courier New" pitchFamily="34" charset="0"/>
                 <a:ea typeface="Courier New" pitchFamily="34" charset="-122"/>
@@ -6803,7 +6815,7 @@
             <a:r>
               <a:rPr lang="en-US" sz="1269" dirty="0">
                 <a:solidFill>
-                  <a:srgbClr val="C9D3F5"/>
+                  <a:srgbClr val="1F2429"/>
                 </a:solidFill>
                 <a:latin typeface="Courier New" pitchFamily="34" charset="0"/>
                 <a:ea typeface="Courier New" pitchFamily="34" charset="-122"/>
@@ -6823,7 +6835,7 @@
             <a:r>
               <a:rPr lang="en-US" sz="1269" dirty="0">
                 <a:solidFill>
-                  <a:srgbClr val="C9D3F5"/>
+                  <a:srgbClr val="1F2429"/>
                 </a:solidFill>
                 <a:latin typeface="Courier New" pitchFamily="34" charset="0"/>
                 <a:ea typeface="Courier New" pitchFamily="34" charset="-122"/>
@@ -6852,7 +6864,7 @@
             <a:r>
               <a:rPr lang="en-US" sz="1269" dirty="0">
                 <a:solidFill>
-                  <a:srgbClr val="C9D3F5"/>
+                  <a:srgbClr val="1F2429"/>
                 </a:solidFill>
                 <a:latin typeface="Courier New" pitchFamily="34" charset="0"/>
                 <a:ea typeface="Courier New" pitchFamily="34" charset="-122"/>
@@ -6872,7 +6884,7 @@
             <a:r>
               <a:rPr lang="en-US" sz="1269" dirty="0">
                 <a:solidFill>
-                  <a:srgbClr val="C9D3F5"/>
+                  <a:srgbClr val="1F2429"/>
                 </a:solidFill>
                 <a:latin typeface="Courier New" pitchFamily="34" charset="0"/>
                 <a:ea typeface="Courier New" pitchFamily="34" charset="-122"/>
@@ -6892,7 +6904,7 @@
             <a:r>
               <a:rPr lang="en-US" sz="1269" dirty="0">
                 <a:solidFill>
-                  <a:srgbClr val="C9D3F5"/>
+                  <a:srgbClr val="1F2429"/>
                 </a:solidFill>
                 <a:latin typeface="Courier New" pitchFamily="34" charset="0"/>
                 <a:ea typeface="Courier New" pitchFamily="34" charset="-122"/>
@@ -6912,7 +6924,7 @@
             <a:r>
               <a:rPr lang="en-US" sz="1269" dirty="0">
                 <a:solidFill>
-                  <a:srgbClr val="C9D3F5"/>
+                  <a:srgbClr val="1F2429"/>
                 </a:solidFill>
                 <a:latin typeface="Courier New" pitchFamily="34" charset="0"/>
                 <a:ea typeface="Courier New" pitchFamily="34" charset="-122"/>
@@ -6932,7 +6944,7 @@
             <a:r>
               <a:rPr lang="en-US" sz="1269" dirty="0">
                 <a:solidFill>
-                  <a:srgbClr val="C9D3F5"/>
+                  <a:srgbClr val="1F2429"/>
                 </a:solidFill>
                 <a:latin typeface="Courier New" pitchFamily="34" charset="0"/>
                 <a:ea typeface="Courier New" pitchFamily="34" charset="-122"/>
@@ -6952,7 +6964,7 @@
             <a:r>
               <a:rPr lang="en-US" sz="1269" dirty="0">
                 <a:solidFill>
-                  <a:srgbClr val="C9D3F5"/>
+                  <a:srgbClr val="1F2429"/>
                 </a:solidFill>
                 <a:latin typeface="Courier New" pitchFamily="34" charset="0"/>
                 <a:ea typeface="Courier New" pitchFamily="34" charset="-122"/>
@@ -6972,7 +6984,7 @@
             <a:r>
               <a:rPr lang="en-US" sz="1269" dirty="0">
                 <a:solidFill>
-                  <a:srgbClr val="C9D3F5"/>
+                  <a:srgbClr val="1F2429"/>
                 </a:solidFill>
                 <a:latin typeface="Courier New" pitchFamily="34" charset="0"/>
                 <a:ea typeface="Courier New" pitchFamily="34" charset="-122"/>
@@ -6992,7 +7004,7 @@
             <a:r>
               <a:rPr lang="en-US" sz="1269" dirty="0">
                 <a:solidFill>
-                  <a:srgbClr val="C9D3F5"/>
+                  <a:srgbClr val="1F2429"/>
                 </a:solidFill>
                 <a:latin typeface="Courier New" pitchFamily="34" charset="0"/>
                 <a:ea typeface="Courier New" pitchFamily="34" charset="-122"/>
@@ -7012,7 +7024,7 @@
             <a:r>
               <a:rPr lang="en-US" sz="1269" dirty="0">
                 <a:solidFill>
-                  <a:srgbClr val="C9D3F5"/>
+                  <a:srgbClr val="1F2429"/>
                 </a:solidFill>
                 <a:latin typeface="Courier New" pitchFamily="34" charset="0"/>
                 <a:ea typeface="Courier New" pitchFamily="34" charset="-122"/>
@@ -7653,9 +7665,13 @@
             </a:avLst>
           </a:prstGeom>
           <a:solidFill>
-            <a:srgbClr val="1E1E4C"/>
+            <a:srgbClr val="F7F8F9"/>
           </a:solidFill>
-          <a:ln/>
+          <a:ln w="9525">
+            <a:solidFill>
+              <a:srgbClr val="D0D5DD"/>
+            </a:solidFill>
+          </a:ln>
         </p:spPr>
         <p:txBody>
           <a:bodyPr/>
@@ -7692,7 +7708,7 @@
             <a:r>
               <a:rPr lang="en-US" sz="1400" dirty="0">
                 <a:solidFill>
-                  <a:srgbClr val="C9D3F5"/>
+                  <a:srgbClr val="1F2429"/>
                 </a:solidFill>
                 <a:latin typeface="Courier New" pitchFamily="34" charset="0"/>
                 <a:ea typeface="Courier New" pitchFamily="34" charset="-122"/>
@@ -7712,7 +7728,7 @@
             <a:r>
               <a:rPr lang="en-US" sz="1400" dirty="0">
                 <a:solidFill>
-                  <a:srgbClr val="C9D3F5"/>
+                  <a:srgbClr val="1F2429"/>
                 </a:solidFill>
                 <a:latin typeface="Courier New" pitchFamily="34" charset="0"/>
                 <a:ea typeface="Courier New" pitchFamily="34" charset="-122"/>
@@ -7732,7 +7748,7 @@
             <a:r>
               <a:rPr lang="en-US" sz="1400" dirty="0">
                 <a:solidFill>
-                  <a:srgbClr val="C9D3F5"/>
+                  <a:srgbClr val="1F2429"/>
                 </a:solidFill>
                 <a:latin typeface="Courier New" pitchFamily="34" charset="0"/>
                 <a:ea typeface="Courier New" pitchFamily="34" charset="-122"/>
@@ -7752,7 +7768,7 @@
             <a:r>
               <a:rPr lang="en-US" sz="1400" dirty="0">
                 <a:solidFill>
-                  <a:srgbClr val="C9D3F5"/>
+                  <a:srgbClr val="1F2429"/>
                 </a:solidFill>
                 <a:latin typeface="Courier New" pitchFamily="34" charset="0"/>
                 <a:ea typeface="Courier New" pitchFamily="34" charset="-122"/>
@@ -7772,7 +7788,7 @@
             <a:r>
               <a:rPr lang="en-US" sz="1400" dirty="0">
                 <a:solidFill>
-                  <a:srgbClr val="C9D3F5"/>
+                  <a:srgbClr val="1F2429"/>
                 </a:solidFill>
                 <a:latin typeface="Courier New" pitchFamily="34" charset="0"/>
                 <a:ea typeface="Courier New" pitchFamily="34" charset="-122"/>
@@ -7792,7 +7808,7 @@
             <a:r>
               <a:rPr lang="en-US" sz="1400" dirty="0">
                 <a:solidFill>
-                  <a:srgbClr val="C9D3F5"/>
+                  <a:srgbClr val="1F2429"/>
                 </a:solidFill>
                 <a:latin typeface="Courier New" pitchFamily="34" charset="0"/>
                 <a:ea typeface="Courier New" pitchFamily="34" charset="-122"/>
@@ -7812,7 +7828,7 @@
             <a:r>
               <a:rPr lang="en-US" sz="1400" dirty="0">
                 <a:solidFill>
-                  <a:srgbClr val="C9D3F5"/>
+                  <a:srgbClr val="1F2429"/>
                 </a:solidFill>
                 <a:latin typeface="Courier New" pitchFamily="34" charset="0"/>
                 <a:ea typeface="Courier New" pitchFamily="34" charset="-122"/>
@@ -7832,7 +7848,7 @@
             <a:r>
               <a:rPr lang="en-US" sz="1400" dirty="0">
                 <a:solidFill>
-                  <a:srgbClr val="C9D3F5"/>
+                  <a:srgbClr val="1F2429"/>
                 </a:solidFill>
                 <a:latin typeface="Courier New" pitchFamily="34" charset="0"/>
                 <a:ea typeface="Courier New" pitchFamily="34" charset="-122"/>
@@ -7852,7 +7868,7 @@
             <a:r>
               <a:rPr lang="en-US" sz="1400" dirty="0">
                 <a:solidFill>
-                  <a:srgbClr val="C9D3F5"/>
+                  <a:srgbClr val="1F2429"/>
                 </a:solidFill>
                 <a:latin typeface="Courier New" pitchFamily="34" charset="0"/>
                 <a:ea typeface="Courier New" pitchFamily="34" charset="-122"/>
@@ -7872,7 +7888,7 @@
             <a:r>
               <a:rPr lang="en-US" sz="1400" dirty="0">
                 <a:solidFill>
-                  <a:srgbClr val="C9D3F5"/>
+                  <a:srgbClr val="1F2429"/>
                 </a:solidFill>
                 <a:latin typeface="Courier New" pitchFamily="34" charset="0"/>
                 <a:ea typeface="Courier New" pitchFamily="34" charset="-122"/>
@@ -7892,7 +7908,7 @@
             <a:r>
               <a:rPr lang="en-US" sz="1400" dirty="0">
                 <a:solidFill>
-                  <a:srgbClr val="C9D3F5"/>
+                  <a:srgbClr val="1F2429"/>
                 </a:solidFill>
                 <a:latin typeface="Courier New" pitchFamily="34" charset="0"/>
                 <a:ea typeface="Courier New" pitchFamily="34" charset="-122"/>
@@ -7912,7 +7928,7 @@
             <a:r>
               <a:rPr lang="en-US" sz="1400" dirty="0">
                 <a:solidFill>
-                  <a:srgbClr val="C9D3F5"/>
+                  <a:srgbClr val="1F2429"/>
                 </a:solidFill>
                 <a:latin typeface="Courier New" pitchFamily="34" charset="0"/>
                 <a:ea typeface="Courier New" pitchFamily="34" charset="-122"/>
@@ -10158,7 +10174,7 @@
         <p:spPr>
           <a:xfrm>
             <a:off x="640080" y="1965960"/>
-            <a:ext cx="10911535" cy="1737360"/>
+            <a:ext cx="10911535" cy="3657600"/>
           </a:xfrm>
           <a:prstGeom prst="roundRect">
             <a:avLst>
@@ -10189,7 +10205,7 @@
         <p:spPr>
           <a:xfrm>
             <a:off x="868680" y="2103120"/>
-            <a:ext cx="10454335" cy="274320"/>
+            <a:ext cx="10454335" cy="400000"/>
           </a:xfrm>
           <a:prstGeom prst="rect">
             <a:avLst/>
@@ -10205,7 +10221,7 @@
               <a:buNone/>
             </a:pPr>
             <a:r>
-              <a:rPr lang="en-US" sz="1000" b="1" spc="200" kern="0" dirty="0">
+              <a:rPr lang="en-US" sz="1800" b="1" spc="200" kern="0" dirty="0">
                 <a:solidFill>
                   <a:srgbClr val="33459E"/>
                 </a:solidFill>
@@ -10215,7 +10231,7 @@
               </a:rPr>
               <a:t>NOTE</a:t>
             </a:r>
-            <a:endParaRPr lang="en-US" sz="1000" dirty="0"/>
+            <a:endParaRPr lang="en-US" sz="1800" dirty="0"/>
           </a:p>
         </p:txBody>
       </p:sp>
@@ -10227,24 +10243,24 @@
         </p:nvSpPr>
         <p:spPr>
           <a:xfrm>
-            <a:off x="868680" y="2404872"/>
-            <a:ext cx="10454335" cy="1143000"/>
-          </a:xfrm>
-          <a:prstGeom prst="rect">
-            <a:avLst/>
-          </a:prstGeom>
-          <a:noFill/>
-          <a:ln/>
-        </p:spPr>
-        <p:txBody>
-          <a:bodyPr wrap="square" lIns="0" tIns="0" rIns="0" bIns="0" rtlCol="0" anchor="t"/>
+            <a:off x="868680" y="2795960"/>
+            <a:ext cx="10454335" cy="2500000"/>
+          </a:xfrm>
+          <a:prstGeom prst="rect">
+            <a:avLst/>
+          </a:prstGeom>
+          <a:noFill/>
+          <a:ln/>
+        </p:spPr>
+        <p:txBody>
+          <a:bodyPr wrap="square" lIns="0" tIns="0" rIns="0" bIns="0" rtlCol="0" anchor="ctr"/>
           <a:lstStyle/>
           <a:p>
             <a:pPr indent="0" marL="0">
               <a:buNone/>
             </a:pPr>
             <a:r>
-              <a:rPr lang="en-US" sz="1250" dirty="0">
+              <a:rPr lang="en-US" sz="2800" dirty="0">
                 <a:solidFill>
                   <a:srgbClr val="26262F"/>
                 </a:solidFill>
@@ -10254,7 +10270,7 @@
               </a:rPr>
               <a:t>Session-based auth remains an excellent, simple choice for traditional server-rendered applications, while JWTs shine when your API is consumed by multiple separate clients (a React SPA, a mobile app) that aren't using browser cookies at all.</a:t>
             </a:r>
-            <a:endParaRPr lang="en-US" sz="1250" dirty="0"/>
+            <a:endParaRPr lang="en-US" sz="2800" dirty="0"/>
           </a:p>
         </p:txBody>
       </p:sp>
@@ -10887,9 +10903,13 @@
             </a:avLst>
           </a:prstGeom>
           <a:solidFill>
-            <a:srgbClr val="1E1E4C"/>
+            <a:srgbClr val="F7F8F9"/>
           </a:solidFill>
-          <a:ln/>
+          <a:ln w="9525">
+            <a:solidFill>
+              <a:srgbClr val="D0D5DD"/>
+            </a:solidFill>
+          </a:ln>
         </p:spPr>
         <p:txBody>
           <a:bodyPr/>
@@ -10926,7 +10946,7 @@
             <a:r>
               <a:rPr lang="en-US" sz="1400" dirty="0">
                 <a:solidFill>
-                  <a:srgbClr val="C9D3F5"/>
+                  <a:srgbClr val="1F2429"/>
                 </a:solidFill>
                 <a:latin typeface="Courier New" pitchFamily="34" charset="0"/>
                 <a:ea typeface="Courier New" pitchFamily="34" charset="-122"/>
@@ -10955,7 +10975,7 @@
             <a:r>
               <a:rPr lang="en-US" sz="1400" dirty="0">
                 <a:solidFill>
-                  <a:srgbClr val="C9D3F5"/>
+                  <a:srgbClr val="1F2429"/>
                 </a:solidFill>
                 <a:latin typeface="Courier New" pitchFamily="34" charset="0"/>
                 <a:ea typeface="Courier New" pitchFamily="34" charset="-122"/>
@@ -10975,7 +10995,7 @@
             <a:r>
               <a:rPr lang="en-US" sz="1400" dirty="0">
                 <a:solidFill>
-                  <a:srgbClr val="C9D3F5"/>
+                  <a:srgbClr val="1F2429"/>
                 </a:solidFill>
                 <a:latin typeface="Courier New" pitchFamily="34" charset="0"/>
                 <a:ea typeface="Courier New" pitchFamily="34" charset="-122"/>
@@ -10995,7 +11015,7 @@
             <a:r>
               <a:rPr lang="en-US" sz="1400" dirty="0">
                 <a:solidFill>
-                  <a:srgbClr val="C9D3F5"/>
+                  <a:srgbClr val="1F2429"/>
                 </a:solidFill>
                 <a:latin typeface="Courier New" pitchFamily="34" charset="0"/>
                 <a:ea typeface="Courier New" pitchFamily="34" charset="-122"/>
@@ -11024,7 +11044,7 @@
             <a:r>
               <a:rPr lang="en-US" sz="1400" dirty="0">
                 <a:solidFill>
-                  <a:srgbClr val="C9D3F5"/>
+                  <a:srgbClr val="1F2429"/>
                 </a:solidFill>
                 <a:latin typeface="Courier New" pitchFamily="34" charset="0"/>
                 <a:ea typeface="Courier New" pitchFamily="34" charset="-122"/>
@@ -11044,7 +11064,7 @@
             <a:r>
               <a:rPr lang="en-US" sz="1400" dirty="0">
                 <a:solidFill>
-                  <a:srgbClr val="C9D3F5"/>
+                  <a:srgbClr val="1F2429"/>
                 </a:solidFill>
                 <a:latin typeface="Courier New" pitchFamily="34" charset="0"/>
                 <a:ea typeface="Courier New" pitchFamily="34" charset="-122"/>
@@ -11257,7 +11277,7 @@
         <p:spPr>
           <a:xfrm>
             <a:off x="640080" y="1965960"/>
-            <a:ext cx="10911535" cy="1828800"/>
+            <a:ext cx="10911535" cy="3657600"/>
           </a:xfrm>
           <a:prstGeom prst="roundRect">
             <a:avLst>
@@ -11288,7 +11308,7 @@
         <p:spPr>
           <a:xfrm>
             <a:off x="868680" y="2103120"/>
-            <a:ext cx="10454335" cy="274320"/>
+            <a:ext cx="10454335" cy="400000"/>
           </a:xfrm>
           <a:prstGeom prst="rect">
             <a:avLst/>
@@ -11304,7 +11324,7 @@
               <a:buNone/>
             </a:pPr>
             <a:r>
-              <a:rPr lang="en-US" sz="1000" b="1" spc="200" kern="0" dirty="0">
+              <a:rPr lang="en-US" sz="1800" b="1" spc="200" kern="0" dirty="0">
                 <a:solidFill>
                   <a:srgbClr val="8A3A12"/>
                 </a:solidFill>
@@ -11314,7 +11334,7 @@
               </a:rPr>
               <a:t>WARNING</a:t>
             </a:r>
-            <a:endParaRPr lang="en-US" sz="1000" dirty="0"/>
+            <a:endParaRPr lang="en-US" sz="1800" dirty="0"/>
           </a:p>
         </p:txBody>
       </p:sp>
@@ -11326,24 +11346,24 @@
         </p:nvSpPr>
         <p:spPr>
           <a:xfrm>
-            <a:off x="868680" y="2404872"/>
-            <a:ext cx="10454335" cy="1234440"/>
-          </a:xfrm>
-          <a:prstGeom prst="rect">
-            <a:avLst/>
-          </a:prstGeom>
-          <a:noFill/>
-          <a:ln/>
-        </p:spPr>
-        <p:txBody>
-          <a:bodyPr wrap="square" lIns="0" tIns="0" rIns="0" bIns="0" rtlCol="0" anchor="t"/>
+            <a:off x="868680" y="2795960"/>
+            <a:ext cx="10454335" cy="2500000"/>
+          </a:xfrm>
+          <a:prstGeom prst="rect">
+            <a:avLst/>
+          </a:prstGeom>
+          <a:noFill/>
+          <a:ln/>
+        </p:spPr>
+        <p:txBody>
+          <a:bodyPr wrap="square" lIns="0" tIns="0" rIns="0" bIns="0" rtlCol="0" anchor="ctr"/>
           <a:lstStyle/>
           <a:p>
             <a:pPr indent="0" marL="0">
               <a:buNone/>
             </a:pPr>
             <a:r>
-              <a:rPr lang="en-US" sz="1250" dirty="0">
+              <a:rPr lang="en-US" sz="2800" dirty="0">
                 <a:solidFill>
                   <a:srgbClr val="26262F"/>
                 </a:solidFill>
@@ -11353,7 +11373,7 @@
               </a:rPr>
               <a:t>Never log, email, or send a user's plain-text password anywhere, even temporarily — and never implement "forgot password" by emailing the old password back, since you never stored it. Send a time-limited reset link/token instead.</a:t>
             </a:r>
-            <a:endParaRPr lang="en-US" sz="1250" dirty="0"/>
+            <a:endParaRPr lang="en-US" sz="2800" dirty="0"/>
           </a:p>
         </p:txBody>
       </p:sp>
@@ -11527,9 +11547,13 @@
             </a:avLst>
           </a:prstGeom>
           <a:solidFill>
-            <a:srgbClr val="1E1E4C"/>
+            <a:srgbClr val="F7F8F9"/>
           </a:solidFill>
-          <a:ln/>
+          <a:ln w="9525">
+            <a:solidFill>
+              <a:srgbClr val="D0D5DD"/>
+            </a:solidFill>
+          </a:ln>
         </p:spPr>
         <p:txBody>
           <a:bodyPr/>
@@ -11566,7 +11590,7 @@
             <a:r>
               <a:rPr lang="en-US" sz="1108" dirty="0">
                 <a:solidFill>
-                  <a:srgbClr val="C9D3F5"/>
+                  <a:srgbClr val="1F2429"/>
                 </a:solidFill>
                 <a:latin typeface="Courier New" pitchFamily="34" charset="0"/>
                 <a:ea typeface="Courier New" pitchFamily="34" charset="-122"/>
@@ -11586,7 +11610,7 @@
             <a:r>
               <a:rPr lang="en-US" sz="1108" dirty="0">
                 <a:solidFill>
-                  <a:srgbClr val="C9D3F5"/>
+                  <a:srgbClr val="1F2429"/>
                 </a:solidFill>
                 <a:latin typeface="Courier New" pitchFamily="34" charset="0"/>
                 <a:ea typeface="Courier New" pitchFamily="34" charset="-122"/>
@@ -11606,7 +11630,7 @@
             <a:r>
               <a:rPr lang="en-US" sz="1108" dirty="0">
                 <a:solidFill>
-                  <a:srgbClr val="C9D3F5"/>
+                  <a:srgbClr val="1F2429"/>
                 </a:solidFill>
                 <a:latin typeface="Courier New" pitchFamily="34" charset="0"/>
                 <a:ea typeface="Courier New" pitchFamily="34" charset="-122"/>
@@ -11626,7 +11650,7 @@
             <a:r>
               <a:rPr lang="en-US" sz="1108" dirty="0">
                 <a:solidFill>
-                  <a:srgbClr val="C9D3F5"/>
+                  <a:srgbClr val="1F2429"/>
                 </a:solidFill>
                 <a:latin typeface="Courier New" pitchFamily="34" charset="0"/>
                 <a:ea typeface="Courier New" pitchFamily="34" charset="-122"/>
@@ -11646,7 +11670,7 @@
             <a:r>
               <a:rPr lang="en-US" sz="1108" dirty="0">
                 <a:solidFill>
-                  <a:srgbClr val="C9D3F5"/>
+                  <a:srgbClr val="1F2429"/>
                 </a:solidFill>
                 <a:latin typeface="Courier New" pitchFamily="34" charset="0"/>
                 <a:ea typeface="Courier New" pitchFamily="34" charset="-122"/>
@@ -11666,7 +11690,7 @@
             <a:r>
               <a:rPr lang="en-US" sz="1108" dirty="0">
                 <a:solidFill>
-                  <a:srgbClr val="C9D3F5"/>
+                  <a:srgbClr val="1F2429"/>
                 </a:solidFill>
                 <a:latin typeface="Courier New" pitchFamily="34" charset="0"/>
                 <a:ea typeface="Courier New" pitchFamily="34" charset="-122"/>
@@ -11686,7 +11710,7 @@
             <a:r>
               <a:rPr lang="en-US" sz="1108" dirty="0">
                 <a:solidFill>
-                  <a:srgbClr val="C9D3F5"/>
+                  <a:srgbClr val="1F2429"/>
                 </a:solidFill>
                 <a:latin typeface="Courier New" pitchFamily="34" charset="0"/>
                 <a:ea typeface="Courier New" pitchFamily="34" charset="-122"/>
@@ -11706,7 +11730,7 @@
             <a:r>
               <a:rPr lang="en-US" sz="1108" dirty="0">
                 <a:solidFill>
-                  <a:srgbClr val="C9D3F5"/>
+                  <a:srgbClr val="1F2429"/>
                 </a:solidFill>
                 <a:latin typeface="Courier New" pitchFamily="34" charset="0"/>
                 <a:ea typeface="Courier New" pitchFamily="34" charset="-122"/>
@@ -11735,7 +11759,7 @@
             <a:r>
               <a:rPr lang="en-US" sz="1108" dirty="0">
                 <a:solidFill>
-                  <a:srgbClr val="C9D3F5"/>
+                  <a:srgbClr val="1F2429"/>
                 </a:solidFill>
                 <a:latin typeface="Courier New" pitchFamily="34" charset="0"/>
                 <a:ea typeface="Courier New" pitchFamily="34" charset="-122"/>
@@ -11755,7 +11779,7 @@
             <a:r>
               <a:rPr lang="en-US" sz="1108" dirty="0">
                 <a:solidFill>
-                  <a:srgbClr val="C9D3F5"/>
+                  <a:srgbClr val="1F2429"/>
                 </a:solidFill>
                 <a:latin typeface="Courier New" pitchFamily="34" charset="0"/>
                 <a:ea typeface="Courier New" pitchFamily="34" charset="-122"/>
@@ -11775,7 +11799,7 @@
             <a:r>
               <a:rPr lang="en-US" sz="1108" dirty="0">
                 <a:solidFill>
-                  <a:srgbClr val="C9D3F5"/>
+                  <a:srgbClr val="1F2429"/>
                 </a:solidFill>
                 <a:latin typeface="Courier New" pitchFamily="34" charset="0"/>
                 <a:ea typeface="Courier New" pitchFamily="34" charset="-122"/>
@@ -11795,7 +11819,7 @@
             <a:r>
               <a:rPr lang="en-US" sz="1108" dirty="0">
                 <a:solidFill>
-                  <a:srgbClr val="C9D3F5"/>
+                  <a:srgbClr val="1F2429"/>
                 </a:solidFill>
                 <a:latin typeface="Courier New" pitchFamily="34" charset="0"/>
                 <a:ea typeface="Courier New" pitchFamily="34" charset="-122"/>
@@ -12008,7 +12032,7 @@
         <p:spPr>
           <a:xfrm>
             <a:off x="640080" y="1965960"/>
-            <a:ext cx="10911535" cy="1554480"/>
+            <a:ext cx="10911535" cy="3657600"/>
           </a:xfrm>
           <a:prstGeom prst="roundRect">
             <a:avLst>
@@ -12039,7 +12063,7 @@
         <p:spPr>
           <a:xfrm>
             <a:off x="868680" y="2103120"/>
-            <a:ext cx="10454335" cy="274320"/>
+            <a:ext cx="10454335" cy="400000"/>
           </a:xfrm>
           <a:prstGeom prst="rect">
             <a:avLst/>
@@ -12055,7 +12079,7 @@
               <a:buNone/>
             </a:pPr>
             <a:r>
-              <a:rPr lang="en-US" sz="1000" b="1" spc="200" kern="0" dirty="0">
+              <a:rPr lang="en-US" sz="1800" b="1" spc="200" kern="0" dirty="0">
                 <a:solidFill>
                   <a:srgbClr val="1F7A46"/>
                 </a:solidFill>
@@ -12065,7 +12089,7 @@
               </a:rPr>
               <a:t>TIP</a:t>
             </a:r>
-            <a:endParaRPr lang="en-US" sz="1000" dirty="0"/>
+            <a:endParaRPr lang="en-US" sz="1800" dirty="0"/>
           </a:p>
         </p:txBody>
       </p:sp>
@@ -12077,24 +12101,24 @@
         </p:nvSpPr>
         <p:spPr>
           <a:xfrm>
-            <a:off x="868680" y="2404872"/>
-            <a:ext cx="10454335" cy="960120"/>
-          </a:xfrm>
-          <a:prstGeom prst="rect">
-            <a:avLst/>
-          </a:prstGeom>
-          <a:noFill/>
-          <a:ln/>
-        </p:spPr>
-        <p:txBody>
-          <a:bodyPr wrap="square" lIns="0" tIns="0" rIns="0" bIns="0" rtlCol="0" anchor="t"/>
+            <a:off x="868680" y="2795960"/>
+            <a:ext cx="10454335" cy="2500000"/>
+          </a:xfrm>
+          <a:prstGeom prst="rect">
+            <a:avLst/>
+          </a:prstGeom>
+          <a:noFill/>
+          <a:ln/>
+        </p:spPr>
+        <p:txBody>
+          <a:bodyPr wrap="square" lIns="0" tIns="0" rIns="0" bIns="0" rtlCol="0" anchor="ctr"/>
           <a:lstStyle/>
           <a:p>
             <a:pPr indent="0" marL="0">
               <a:buNone/>
             </a:pPr>
             <a:r>
-              <a:rPr lang="en-US" sz="1250" dirty="0">
+              <a:rPr lang="en-US" sz="2800" dirty="0">
                 <a:solidFill>
                   <a:srgbClr val="26262F"/>
                 </a:solidFill>
@@ -12104,7 +12128,7 @@
               </a:rPr>
               <a:t>This uses the same middleware-chaining pattern from the Middleware lecture — authentication and authorization are two of the most common real-world uses for custom middleware.</a:t>
             </a:r>
-            <a:endParaRPr lang="en-US" sz="1250" dirty="0"/>
+            <a:endParaRPr lang="en-US" sz="2800" dirty="0"/>
           </a:p>
         </p:txBody>
       </p:sp>
@@ -14502,7 +14526,7 @@
         <p:spPr>
           <a:xfrm>
             <a:off x="640080" y="1965960"/>
-            <a:ext cx="10911535" cy="1554480"/>
+            <a:ext cx="10911535" cy="3657600"/>
           </a:xfrm>
           <a:prstGeom prst="roundRect">
             <a:avLst>
@@ -14533,7 +14557,7 @@
         <p:spPr>
           <a:xfrm>
             <a:off x="868680" y="2103120"/>
-            <a:ext cx="10454335" cy="274320"/>
+            <a:ext cx="10454335" cy="400000"/>
           </a:xfrm>
           <a:prstGeom prst="rect">
             <a:avLst/>
@@ -14549,7 +14573,7 @@
               <a:buNone/>
             </a:pPr>
             <a:r>
-              <a:rPr lang="en-US" sz="1000" b="1" spc="200" kern="0" dirty="0">
+              <a:rPr lang="en-US" sz="1800" b="1" spc="200" kern="0" dirty="0">
                 <a:solidFill>
                   <a:srgbClr val="1F7A46"/>
                 </a:solidFill>
@@ -14559,7 +14583,7 @@
               </a:rPr>
               <a:t>TIP</a:t>
             </a:r>
-            <a:endParaRPr lang="en-US" sz="1000" dirty="0"/>
+            <a:endParaRPr lang="en-US" sz="1800" dirty="0"/>
           </a:p>
         </p:txBody>
       </p:sp>
@@ -14571,24 +14595,24 @@
         </p:nvSpPr>
         <p:spPr>
           <a:xfrm>
-            <a:off x="868680" y="2404872"/>
-            <a:ext cx="10454335" cy="960120"/>
-          </a:xfrm>
-          <a:prstGeom prst="rect">
-            <a:avLst/>
-          </a:prstGeom>
-          <a:noFill/>
-          <a:ln/>
-        </p:spPr>
-        <p:txBody>
-          <a:bodyPr wrap="square" lIns="0" tIns="0" rIns="0" bIns="0" rtlCol="0" anchor="t"/>
+            <a:off x="868680" y="2795960"/>
+            <a:ext cx="10454335" cy="2500000"/>
+          </a:xfrm>
+          <a:prstGeom prst="rect">
+            <a:avLst/>
+          </a:prstGeom>
+          <a:noFill/>
+          <a:ln/>
+        </p:spPr>
+        <p:txBody>
+          <a:bodyPr wrap="square" lIns="0" tIns="0" rIns="0" bIns="0" rtlCol="0" anchor="ctr"/>
           <a:lstStyle/>
           <a:p>
             <a:pPr indent="0" marL="0">
               <a:buNone/>
             </a:pPr>
             <a:r>
-              <a:rPr lang="en-US" sz="1250" dirty="0">
+              <a:rPr lang="en-US" sz="2800" dirty="0">
                 <a:solidFill>
                   <a:srgbClr val="26262F"/>
                 </a:solidFill>
@@ -14598,7 +14622,7 @@
               </a:rPr>
               <a:t>Use plural nouns for resource names (/users, not /user), and never put a verb in the URI (avoid /getUsers or /deleteUser/5) — the HTTP method already communicates the action.</a:t>
             </a:r>
-            <a:endParaRPr lang="en-US" sz="1250" dirty="0"/>
+            <a:endParaRPr lang="en-US" sz="2800" dirty="0"/>
           </a:p>
         </p:txBody>
       </p:sp>
@@ -17762,9 +17786,13 @@
             </a:avLst>
           </a:prstGeom>
           <a:solidFill>
-            <a:srgbClr val="1E1E4C"/>
+            <a:srgbClr val="F7F8F9"/>
           </a:solidFill>
-          <a:ln/>
+          <a:ln w="9525">
+            <a:solidFill>
+              <a:srgbClr val="D0D5DD"/>
+            </a:solidFill>
+          </a:ln>
         </p:spPr>
         <p:txBody>
           <a:bodyPr/>
@@ -17801,7 +17829,7 @@
             <a:r>
               <a:rPr lang="en-US" sz="1400" dirty="0">
                 <a:solidFill>
-                  <a:srgbClr val="C9D3F5"/>
+                  <a:srgbClr val="1F2429"/>
                 </a:solidFill>
                 <a:latin typeface="Courier New" pitchFamily="34" charset="0"/>
                 <a:ea typeface="Courier New" pitchFamily="34" charset="-122"/>
@@ -17821,7 +17849,7 @@
             <a:r>
               <a:rPr lang="en-US" sz="1400" dirty="0">
                 <a:solidFill>
-                  <a:srgbClr val="C9D3F5"/>
+                  <a:srgbClr val="1F2429"/>
                 </a:solidFill>
                 <a:latin typeface="Courier New" pitchFamily="34" charset="0"/>
                 <a:ea typeface="Courier New" pitchFamily="34" charset="-122"/>
@@ -17841,7 +17869,7 @@
             <a:r>
               <a:rPr lang="en-US" sz="1400" dirty="0">
                 <a:solidFill>
-                  <a:srgbClr val="C9D3F5"/>
+                  <a:srgbClr val="1F2429"/>
                 </a:solidFill>
                 <a:latin typeface="Courier New" pitchFamily="34" charset="0"/>
                 <a:ea typeface="Courier New" pitchFamily="34" charset="-122"/>
@@ -17861,7 +17889,7 @@
             <a:r>
               <a:rPr lang="en-US" sz="1400" dirty="0">
                 <a:solidFill>
-                  <a:srgbClr val="C9D3F5"/>
+                  <a:srgbClr val="1F2429"/>
                 </a:solidFill>
                 <a:latin typeface="Courier New" pitchFamily="34" charset="0"/>
                 <a:ea typeface="Courier New" pitchFamily="34" charset="-122"/>
@@ -17881,7 +17909,7 @@
             <a:r>
               <a:rPr lang="en-US" sz="1400" dirty="0">
                 <a:solidFill>
-                  <a:srgbClr val="C9D3F5"/>
+                  <a:srgbClr val="1F2429"/>
                 </a:solidFill>
                 <a:latin typeface="Courier New" pitchFamily="34" charset="0"/>
                 <a:ea typeface="Courier New" pitchFamily="34" charset="-122"/>
@@ -17910,7 +17938,7 @@
             <a:r>
               <a:rPr lang="en-US" sz="1400" dirty="0">
                 <a:solidFill>
-                  <a:srgbClr val="C9D3F5"/>
+                  <a:srgbClr val="1F2429"/>
                 </a:solidFill>
                 <a:latin typeface="Courier New" pitchFamily="34" charset="0"/>
                 <a:ea typeface="Courier New" pitchFamily="34" charset="-122"/>
@@ -17930,7 +17958,7 @@
             <a:r>
               <a:rPr lang="en-US" sz="1400" dirty="0">
                 <a:solidFill>
-                  <a:srgbClr val="C9D3F5"/>
+                  <a:srgbClr val="1F2429"/>
                 </a:solidFill>
                 <a:latin typeface="Courier New" pitchFamily="34" charset="0"/>
                 <a:ea typeface="Courier New" pitchFamily="34" charset="-122"/>
@@ -17950,7 +17978,7 @@
             <a:r>
               <a:rPr lang="en-US" sz="1400" dirty="0">
                 <a:solidFill>
-                  <a:srgbClr val="C9D3F5"/>
+                  <a:srgbClr val="1F2429"/>
                 </a:solidFill>
                 <a:latin typeface="Courier New" pitchFamily="34" charset="0"/>
                 <a:ea typeface="Courier New" pitchFamily="34" charset="-122"/>
@@ -17970,7 +17998,7 @@
             <a:r>
               <a:rPr lang="en-US" sz="1400" dirty="0">
                 <a:solidFill>
-                  <a:srgbClr val="C9D3F5"/>
+                  <a:srgbClr val="1F2429"/>
                 </a:solidFill>
                 <a:latin typeface="Courier New" pitchFamily="34" charset="0"/>
                 <a:ea typeface="Courier New" pitchFamily="34" charset="-122"/>
@@ -17990,7 +18018,7 @@
             <a:r>
               <a:rPr lang="en-US" sz="1400" dirty="0">
                 <a:solidFill>
-                  <a:srgbClr val="C9D3F5"/>
+                  <a:srgbClr val="1F2429"/>
                 </a:solidFill>
                 <a:latin typeface="Courier New" pitchFamily="34" charset="0"/>
                 <a:ea typeface="Courier New" pitchFamily="34" charset="-122"/>
@@ -18010,7 +18038,7 @@
             <a:r>
               <a:rPr lang="en-US" sz="1400" dirty="0">
                 <a:solidFill>
-                  <a:srgbClr val="C9D3F5"/>
+                  <a:srgbClr val="1F2429"/>
                 </a:solidFill>
                 <a:latin typeface="Courier New" pitchFamily="34" charset="0"/>
                 <a:ea typeface="Courier New" pitchFamily="34" charset="-122"/>
